--- a/artifacts/speaking-portfolio-expanded/decks/product-engineering-40min-screen.pptx
+++ b/artifacts/speaking-portfolio-expanded/decks/product-engineering-40min-screen.pptx
@@ -23,6 +23,8 @@
     <p:sldId id="268" r:id="rIdSlide13"/>
     <p:sldId id="269" r:id="rIdSlide14"/>
     <p:sldId id="270" r:id="rIdSlide15"/>
+    <p:sldId id="271" r:id="rIdSlide16"/>
+    <p:sldId id="272" r:id="rIdSlide17"/>
   </p:sldIdLst>
   <p:sldSz cx="13716000" cy="8572500" type="custom"/>
   <p:notesSz cx="6858000" cy="9144000"/>
@@ -611,7 +613,7 @@
                 <a:ea typeface="Arial"/>
                 <a:cs typeface="Arial"/>
               </a:rPr>
-              <a:t xml:space="preserve">21:00 to 23:00 · build</a:t>
+              <a:t xml:space="preserve">18:30 to 20:30 · build</a:t>
             </a:r>
             <a:endParaRPr lang="en-US" sz="1200"/>
           </a:p>
@@ -1023,7 +1025,7 @@
                 <a:ea typeface="Arial"/>
                 <a:cs typeface="Arial"/>
               </a:rPr>
-              <a:t xml:space="preserve">23:00 to 28:00 · peak</a:t>
+              <a:t xml:space="preserve">20:30 to 25:00 · peak</a:t>
             </a:r>
             <a:endParaRPr lang="en-US" sz="1200"/>
           </a:p>
@@ -1345,7 +1347,7 @@
                 <a:ea typeface="Arial"/>
                 <a:cs typeface="Arial"/>
               </a:rPr>
-              <a:t xml:space="preserve">Stage direction: Five minutes in the 40/30 routes, 3:30 in the 15. Begin with only this slide, never the answer-labelled kit. After the vote open the kit and map B to Pressure copy, C to Clearer first step. Follow economics-product/demo.md. Allow 45 seconds to write the rule.</a:t>
+              <a:t xml:space="preserve">Stage direction: Four and a half minutes in the 40/30 routes, 3:30 in the 15. Begin with only this slide, never the answer-labelled kit. After the vote open the kit and map B to Pressure copy, C to Clearer first step. Follow economics-product/demo.md. Allow 45 seconds to write the rule.</a:t>
             </a:r>
             <a:endParaRPr lang="en-US" sz="1200"/>
           </a:p>
@@ -1504,7 +1506,7 @@
                 <a:ea typeface="Arial"/>
                 <a:cs typeface="Arial"/>
               </a:rPr>
-              <a:t xml:space="preserve">28:00 to 31:00 · build</a:t>
+              <a:t xml:space="preserve">25:00 to 27:30 · build</a:t>
             </a:r>
             <a:endParaRPr lang="en-US" sz="1200"/>
           </a:p>
@@ -1711,7 +1713,7 @@
                 <a:ea typeface="Arial"/>
                 <a:cs typeface="Arial"/>
               </a:rPr>
-              <a:t xml:space="preserve">Then add the two missing from the old list. Sending a message to a real customer. Deleting their records. Those are consequences for another person, even when the API call costs a fraction of a cent. A person approves them. The system must enforce that permission, not merely mention it in the prompt.</a:t>
+              <a:t xml:space="preserve">Then add the two missing from the old list. Sending a message to a real customer. Deleting their records. Those are consequences for another person, even when the API call costs a fraction of a cent. A person approves them, and the system enforces that permission rather than mentioning it in a prompt.</a:t>
             </a:r>
             <a:endParaRPr lang="en-US" sz="1200"/>
           </a:p>
@@ -1870,7 +1872,7 @@
                 <a:ea typeface="Arial"/>
                 <a:cs typeface="Arial"/>
               </a:rPr>
-              <a:t xml:space="preserve">31:00 to 34:00 · build</a:t>
+              <a:t xml:space="preserve">27:30 to 30:00 · build</a:t>
             </a:r>
             <a:endParaRPr lang="en-US" sz="1200"/>
           </a:p>
@@ -2031,7 +2033,7 @@
                 <a:ea typeface="Arial"/>
                 <a:cs typeface="Arial"/>
               </a:rPr>
-              <a:t xml:space="preserve">Graicunas counted possible direct, cross, and group relationships. His maximum counting formula is n times two to the n minus one, plus n minus one. For six, that is six times thirty-seven: 222. This is combinatorics, not a staffing limit. It does not mean your six agents generate 222 meetings.</a:t>
+              <a:t xml:space="preserve">Graicunas counted possible direct, cross, and group relationships. His maximum counting formula is n times the quantity two-to-the-n-minus-one plus n-minus-one. For six that is six times the quantity thirty-two plus five, which is six times thirty-seven: 222. This is combinatorics, not a staffing limit. It does not mean your six agents generate 222 meetings.</a:t>
             </a:r>
             <a:endParaRPr lang="en-US" sz="1200"/>
           </a:p>
@@ -2077,7 +2079,7 @@
                 <a:ea typeface="Arial"/>
                 <a:cs typeface="Arial"/>
               </a:rPr>
-              <a:t xml:space="preserve">The lesson for our design is to restrict the interfaces we actually require. Bainbridge adds the human problem: automation leaves monitoring and exceptional interventions while removing routine practice. Assign recovery drills and review time along with the agent. An owner field without capacity is a forwarding address for blame.</a:t>
+              <a:t xml:space="preserve">The lesson is to restrict the interfaces we actually require. Bainbridge adds the human problem: automation leaves monitoring and exceptional interventions while removing routine practice. Assign recovery drills and review time along with the agent. An owner field without capacity is a forwarding address for blame.</a:t>
             </a:r>
             <a:endParaRPr lang="en-US" sz="1200"/>
           </a:p>
@@ -2282,7 +2284,7 @@
                 <a:ea typeface="Arial"/>
                 <a:cs typeface="Arial"/>
               </a:rPr>
-              <a:t xml:space="preserve">Every experiment reports its hypothesis</a:t>
+              <a:t xml:space="preserve">Software Runs on Petrol Now</a:t>
             </a:r>
             <a:endParaRPr lang="en-US" sz="1200"/>
           </a:p>
@@ -2328,7 +2330,7 @@
                 <a:ea typeface="Arial"/>
                 <a:cs typeface="Arial"/>
               </a:rPr>
-              <a:t xml:space="preserve">34:00 to 37:00 · land</a:t>
+              <a:t xml:space="preserve">30:00 to 32:30 · build</a:t>
             </a:r>
             <a:endParaRPr lang="en-US" sz="1200"/>
           </a:p>
@@ -2374,30 +2376,53 @@
                 <a:ea typeface="Arial"/>
                 <a:cs typeface="Arial"/>
               </a:rPr>
-              <a:t xml:space="preserve">&gt; If we do X, we expect Y to move</a:t>
-            </a:r>
-            <a:endParaRPr lang="en-US" sz="1200"/>
-          </a:p>
-          <a:p>
-            <a:pPr marL="0" indent="0">
-              <a:lnSpc>
-                <a:spcPts val="1560"/>
-              </a:lnSpc>
-              <a:spcAft>
-                <a:spcPts val="0"/>
-              </a:spcAft>
-              <a:buNone/>
-            </a:pPr>
-            <a:r>
-              <a:rPr lang="en-US" sz="1200" b="0">
-                <a:solidFill>
-                  <a:srgbClr val="202b33"/>
-                </a:solidFill>
-                <a:latin typeface="Arial"/>
-                <a:ea typeface="Arial"/>
-                <a:cs typeface="Arial"/>
-              </a:rPr>
-              <a:t xml:space="preserve">&gt; Report success, failure, and surprise where the team looks</a:t>
+              <a:t xml:space="preserve">&gt; Tokens stop being a build cost and become a running cost</a:t>
+            </a:r>
+            <a:endParaRPr lang="en-US" sz="1200"/>
+          </a:p>
+          <a:p>
+            <a:pPr marL="0" indent="0">
+              <a:lnSpc>
+                <a:spcPts val="1560"/>
+              </a:lnSpc>
+              <a:spcAft>
+                <a:spcPts val="0"/>
+              </a:spcAft>
+              <a:buNone/>
+            </a:pPr>
+            <a:r>
+              <a:rPr lang="en-US" sz="1200" b="0">
+                <a:solidFill>
+                  <a:srgbClr val="202b33"/>
+                </a:solidFill>
+                <a:latin typeface="Arial"/>
+                <a:ea typeface="Arial"/>
+                <a:cs typeface="Arial"/>
+              </a:rPr>
+              <a:t xml:space="preserve">&gt; Sentry bots hunting your own vulnerabilities, 24/7, forever</a:t>
+            </a:r>
+            <a:endParaRPr lang="en-US" sz="1200"/>
+          </a:p>
+          <a:p>
+            <a:pPr marL="0" indent="0">
+              <a:lnSpc>
+                <a:spcPts val="1560"/>
+              </a:lnSpc>
+              <a:spcAft>
+                <a:spcPts val="0"/>
+              </a:spcAft>
+              <a:buNone/>
+            </a:pPr>
+            <a:r>
+              <a:rPr lang="en-US" sz="1200" b="0">
+                <a:solidFill>
+                  <a:srgbClr val="202b33"/>
+                </a:solidFill>
+                <a:latin typeface="Arial"/>
+                <a:ea typeface="Arial"/>
+                <a:cs typeface="Arial"/>
+              </a:rPr>
+              <a:t xml:space="preserve">&gt; Be careful firing the security bots. They know who you are.</a:t>
             </a:r>
             <a:endParaRPr lang="en-US" sz="1200"/>
           </a:p>
@@ -2443,7 +2468,7 @@
                 <a:ea typeface="Arial"/>
                 <a:cs typeface="Arial"/>
               </a:rPr>
-              <a:t xml:space="preserve">Every beta, ad test, and feature flag gets a hypothesis. If we change this, we expect that to increase. State who it is for, what would make us stop, and when we will look.</a:t>
+              <a:t xml:space="preserve">Two predictions to close on, and I will label them as predictions once: this is where I think the operating model goes, not something I have measured. Here is the first. Today you buy tokens to build software. Before long most software will need a steady stream of them just to keep running: to stay current with its dependencies, to re-derive the integration a vendor renamed last night, to keep its own documentation true. Steady for some systems, bursty for others. Either way it stops being a build cost and becomes fuel, and you will meter it the way you meter electricity, which is to say you will only notice it when it moves.</a:t>
             </a:r>
             <a:endParaRPr lang="en-US" sz="1200"/>
           </a:p>
@@ -2489,7 +2514,7 @@
                 <a:ea typeface="Arial"/>
                 <a:cs typeface="Arial"/>
               </a:rPr>
-              <a:t xml:space="preserve">Generate the measurement with the change. A scheduled report is fine. It needs the exposure count, the intended outcome, the unwanted outcomes, and the owner who will act. The report goes where the team already looks. A dashboard is optional. Remembering to check it is a bad dependency.</a:t>
+              <a:t xml:space="preserve">And some of that burn is not features at all. It is defense. If an attacker can point a tireless agent at your surface, the only symmetric answer is a tireless agent of your own: self-hacking around the clock, finding and mitigating faster than the countless people trying to get in. That is a permanent line item on a product that is otherwise finished. It never completes.</a:t>
             </a:r>
             <a:endParaRPr lang="en-US" sz="1200"/>
           </a:p>
@@ -2535,7 +2560,7 @@
                 <a:ea typeface="Arial"/>
                 <a:cs typeface="Arial"/>
               </a:rPr>
-              <a:t xml:space="preserve">Take the handoff you named near the start. Write the artifact an agent would produce, who receives it, and the observation that would make them reject it. If that last field is blank, you have designed a suggestion machine.</a:t>
+              <a:t xml:space="preserve">Be careful when you fire the security sentry bots, incidentally. They know who you are. They know where the keys are. They have read all of your commits. Underneath the joke is the question from slide 12: an agent whose account you revoked while its credential is still live is the boring version of this, and it happens today.</a:t>
             </a:r>
             <a:endParaRPr lang="en-US" sz="1200"/>
           </a:p>
@@ -2581,7 +2606,7 @@
                 <a:ea typeface="Arial"/>
                 <a:cs typeface="Arial"/>
               </a:rPr>
-              <a:t xml:space="preserve">Stage direction: Give 45 seconds to write. Walk through one answer for the remaining discussion time.</a:t>
+              <a:t xml:space="preserve">So price it now. When you draw the wires between agents, one of those wires is a fuel line. The ongoing burn of a function belongs in the design doc beside its latency budget, and somebody owns that meter. It is not the person who wrote the prompt. Buy Me a Free Tier owns the arithmetic; what belongs on this org chart is the owner.</a:t>
             </a:r>
             <a:endParaRPr lang="en-US" sz="1200"/>
           </a:p>
@@ -2627,7 +2652,53 @@
                 <a:ea typeface="Arial"/>
                 <a:cs typeface="Arial"/>
               </a:rPr>
-              <a:t xml:space="preserve">Source: Microsoft ExP (2020), [Patterns of trustworthy experimentation: pre-experiment stage](https://www.microsoft.com/en-us/research/articles/patterns-of-trustworthy-experimentation-pre-experiment-stage/).</a:t>
+              <a:t xml:space="preserve">Story: The first time an always-on agent showed up as a recurring cost nobody had budgeted.</a:t>
+            </a:r>
+            <a:endParaRPr lang="en-US" sz="1200"/>
+          </a:p>
+          <a:p>
+            <a:pPr marL="0" indent="0">
+              <a:lnSpc>
+                <a:spcPts val="1560"/>
+              </a:lnSpc>
+              <a:spcAft>
+                <a:spcPts val="0"/>
+              </a:spcAft>
+              <a:buNone/>
+            </a:pPr>
+            <a:r>
+              <a:rPr lang="en-US" sz="1200" b="0">
+                <a:solidFill>
+                  <a:srgbClr val="202b33"/>
+                </a:solidFill>
+                <a:latin typeface="Arial"/>
+                <a:ea typeface="Arial"/>
+                <a:cs typeface="Arial"/>
+              </a:rPr>
+              <a:t xml:space="preserve"/>
+            </a:r>
+            <a:endParaRPr lang="en-US" sz="1200"/>
+          </a:p>
+          <a:p>
+            <a:pPr marL="0" indent="0">
+              <a:lnSpc>
+                <a:spcPts val="1560"/>
+              </a:lnSpc>
+              <a:spcAft>
+                <a:spcPts val="0"/>
+              </a:spcAft>
+              <a:buNone/>
+            </a:pPr>
+            <a:r>
+              <a:rPr lang="en-US" sz="1200" b="0">
+                <a:solidFill>
+                  <a:srgbClr val="202b33"/>
+                </a:solidFill>
+                <a:latin typeface="Arial"/>
+                <a:ea typeface="Arial"/>
+                <a:cs typeface="Arial"/>
+              </a:rPr>
+              <a:t xml:space="preserve">Stage direction: Ask who has a security agent running right now with credentials nobody has rotated. Do not take an answer.</a:t>
             </a:r>
             <a:endParaRPr lang="en-US" sz="1200"/>
           </a:p>
@@ -2740,6 +2811,991 @@
                 <a:ea typeface="Arial"/>
                 <a:cs typeface="Arial"/>
               </a:rPr>
+              <a:t xml:space="preserve">Minority Report, With Terminals</a:t>
+            </a:r>
+            <a:endParaRPr lang="en-US" sz="1200"/>
+          </a:p>
+          <a:p>
+            <a:pPr marL="0" indent="0">
+              <a:lnSpc>
+                <a:spcPts val="1560"/>
+              </a:lnSpc>
+              <a:spcAft>
+                <a:spcPts val="0"/>
+              </a:spcAft>
+              <a:buNone/>
+            </a:pPr>
+            <a:r>
+              <a:rPr lang="en-US" sz="1200" b="0">
+                <a:solidFill>
+                  <a:srgbClr val="202b33"/>
+                </a:solidFill>
+                <a:latin typeface="Arial"/>
+                <a:ea typeface="Arial"/>
+                <a:cs typeface="Arial"/>
+              </a:rPr>
+              <a:t xml:space="preserve"/>
+            </a:r>
+            <a:endParaRPr lang="en-US" sz="1200"/>
+          </a:p>
+          <a:p>
+            <a:pPr marL="0" indent="0">
+              <a:lnSpc>
+                <a:spcPts val="1560"/>
+              </a:lnSpc>
+              <a:spcAft>
+                <a:spcPts val="0"/>
+              </a:spcAft>
+              <a:buNone/>
+            </a:pPr>
+            <a:r>
+              <a:rPr lang="en-US" sz="1200" b="0">
+                <a:solidFill>
+                  <a:srgbClr val="202b33"/>
+                </a:solidFill>
+                <a:latin typeface="Arial"/>
+                <a:ea typeface="Arial"/>
+                <a:cs typeface="Arial"/>
+              </a:rPr>
+              <a:t xml:space="preserve">32:30 to 35:30 · land</a:t>
+            </a:r>
+            <a:endParaRPr lang="en-US" sz="1200"/>
+          </a:p>
+          <a:p>
+            <a:pPr marL="0" indent="0">
+              <a:lnSpc>
+                <a:spcPts val="1560"/>
+              </a:lnSpc>
+              <a:spcAft>
+                <a:spcPts val="0"/>
+              </a:spcAft>
+              <a:buNone/>
+            </a:pPr>
+            <a:r>
+              <a:rPr lang="en-US" sz="1200" b="0">
+                <a:solidFill>
+                  <a:srgbClr val="202b33"/>
+                </a:solidFill>
+                <a:latin typeface="Arial"/>
+                <a:ea typeface="Arial"/>
+                <a:cs typeface="Arial"/>
+              </a:rPr>
+              <a:t xml:space="preserve"/>
+            </a:r>
+            <a:endParaRPr lang="en-US" sz="1200"/>
+          </a:p>
+          <a:p>
+            <a:pPr marL="0" indent="0">
+              <a:lnSpc>
+                <a:spcPts val="1560"/>
+              </a:lnSpc>
+              <a:spcAft>
+                <a:spcPts val="0"/>
+              </a:spcAft>
+              <a:buNone/>
+            </a:pPr>
+            <a:r>
+              <a:rPr lang="en-US" sz="1200" b="0">
+                <a:solidFill>
+                  <a:srgbClr val="202b33"/>
+                </a:solidFill>
+                <a:latin typeface="Arial"/>
+                <a:ea typeface="Arial"/>
+                <a:cs typeface="Arial"/>
+              </a:rPr>
+              <a:t xml:space="preserve">&gt; Generated UI, adapting in real time, per person</a:t>
+            </a:r>
+            <a:endParaRPr lang="en-US" sz="1200"/>
+          </a:p>
+          <a:p>
+            <a:pPr marL="0" indent="0">
+              <a:lnSpc>
+                <a:spcPts val="1560"/>
+              </a:lnSpc>
+              <a:spcAft>
+                <a:spcPts val="0"/>
+              </a:spcAft>
+              <a:buNone/>
+            </a:pPr>
+            <a:r>
+              <a:rPr lang="en-US" sz="1200" b="0">
+                <a:solidFill>
+                  <a:srgbClr val="202b33"/>
+                </a:solidFill>
+                <a:latin typeface="Arial"/>
+                <a:ea typeface="Arial"/>
+                <a:cs typeface="Arial"/>
+              </a:rPr>
+              <a:t xml:space="preserve">&gt; Yes, the software you mastered is going away. As you know it.</a:t>
+            </a:r>
+            <a:endParaRPr lang="en-US" sz="1200"/>
+          </a:p>
+          <a:p>
+            <a:pPr marL="0" indent="0">
+              <a:lnSpc>
+                <a:spcPts val="1560"/>
+              </a:lnSpc>
+              <a:spcAft>
+                <a:spcPts val="0"/>
+              </a:spcAft>
+              <a:buNone/>
+            </a:pPr>
+            <a:r>
+              <a:rPr lang="en-US" sz="1200" b="0">
+                <a:solidFill>
+                  <a:srgbClr val="202b33"/>
+                </a:solidFill>
+                <a:latin typeface="Arial"/>
+                <a:ea typeface="Arial"/>
+                <a:cs typeface="Arial"/>
+              </a:rPr>
+              <a:t xml:space="preserve">&gt; The channel is not spoken for.</a:t>
+            </a:r>
+            <a:endParaRPr lang="en-US" sz="1200"/>
+          </a:p>
+          <a:p>
+            <a:pPr marL="0" indent="0">
+              <a:lnSpc>
+                <a:spcPts val="1560"/>
+              </a:lnSpc>
+              <a:spcAft>
+                <a:spcPts val="0"/>
+              </a:spcAft>
+              <a:buNone/>
+            </a:pPr>
+            <a:r>
+              <a:rPr lang="en-US" sz="1200" b="0">
+                <a:solidFill>
+                  <a:srgbClr val="202b33"/>
+                </a:solidFill>
+                <a:latin typeface="Arial"/>
+                <a:ea typeface="Arial"/>
+                <a:cs typeface="Arial"/>
+              </a:rPr>
+              <a:t xml:space="preserve"/>
+            </a:r>
+            <a:endParaRPr lang="en-US" sz="1200"/>
+          </a:p>
+          <a:p>
+            <a:pPr marL="0" indent="0">
+              <a:lnSpc>
+                <a:spcPts val="1560"/>
+              </a:lnSpc>
+              <a:spcAft>
+                <a:spcPts val="0"/>
+              </a:spcAft>
+              <a:buNone/>
+            </a:pPr>
+            <a:r>
+              <a:rPr lang="en-US" sz="1200" b="0">
+                <a:solidFill>
+                  <a:srgbClr val="202b33"/>
+                </a:solidFill>
+                <a:latin typeface="Arial"/>
+                <a:ea typeface="Arial"/>
+                <a:cs typeface="Arial"/>
+              </a:rPr>
+              <a:t xml:space="preserve">Second prediction, and this one is less comfortable. AI does not magically make software work. Well-understood software still gets harder to operate as the world moves under it: you outgrow a performance envelope, you accumulate features, somebody deprecates your dependency. Generation makes the first version cheap. It does not make the tenth year cheap.</a:t>
+            </a:r>
+            <a:endParaRPr lang="en-US" sz="1200"/>
+          </a:p>
+          <a:p>
+            <a:pPr marL="0" indent="0">
+              <a:lnSpc>
+                <a:spcPts val="1560"/>
+              </a:lnSpc>
+              <a:spcAft>
+                <a:spcPts val="0"/>
+              </a:spcAft>
+              <a:buNone/>
+            </a:pPr>
+            <a:r>
+              <a:rPr lang="en-US" sz="1200" b="0">
+                <a:solidFill>
+                  <a:srgbClr val="202b33"/>
+                </a:solidFill>
+                <a:latin typeface="Arial"/>
+                <a:ea typeface="Arial"/>
+                <a:cs typeface="Arial"/>
+              </a:rPr>
+              <a:t xml:space="preserve"/>
+            </a:r>
+            <a:endParaRPr lang="en-US" sz="1200"/>
+          </a:p>
+          <a:p>
+            <a:pPr marL="0" indent="0">
+              <a:lnSpc>
+                <a:spcPts val="1560"/>
+              </a:lnSpc>
+              <a:spcAft>
+                <a:spcPts val="0"/>
+              </a:spcAft>
+              <a:buNone/>
+            </a:pPr>
+            <a:r>
+              <a:rPr lang="en-US" sz="1200" b="0">
+                <a:solidFill>
+                  <a:srgbClr val="202b33"/>
+                </a:solidFill>
+                <a:latin typeface="Arial"/>
+                <a:ea typeface="Arial"/>
+                <a:cs typeface="Arial"/>
+              </a:rPr>
+              <a:t xml:space="preserve">And throwaway software is a taste most of this room has and most of the world does not. We are early adopters; we are delighted to regenerate a tool rather than maintain it. Normal people are not turned on by the idea of vibe coding their own recipe tracker, never mind a Slack replacement. What they will accept is an interface generated for them, adapting in real time, that they never had to choose from a menu of products.</a:t>
+            </a:r>
+            <a:endParaRPr lang="en-US" sz="1200"/>
+          </a:p>
+          <a:p>
+            <a:pPr marL="0" indent="0">
+              <a:lnSpc>
+                <a:spcPts val="1560"/>
+              </a:lnSpc>
+              <a:spcAft>
+                <a:spcPts val="0"/>
+              </a:spcAft>
+              <a:buNone/>
+            </a:pPr>
+            <a:r>
+              <a:rPr lang="en-US" sz="1200" b="0">
+                <a:solidFill>
+                  <a:srgbClr val="202b33"/>
+                </a:solidFill>
+                <a:latin typeface="Arial"/>
+                <a:ea typeface="Arial"/>
+                <a:cs typeface="Arial"/>
+              </a:rPr>
+              <a:t xml:space="preserve"/>
+            </a:r>
+            <a:endParaRPr lang="en-US" sz="1200"/>
+          </a:p>
+          <a:p>
+            <a:pPr marL="0" indent="0">
+              <a:lnSpc>
+                <a:spcPts val="1560"/>
+              </a:lnSpc>
+              <a:spcAft>
+                <a:spcPts val="0"/>
+              </a:spcAft>
+              <a:buNone/>
+            </a:pPr>
+            <a:r>
+              <a:rPr lang="en-US" sz="1200" b="0">
+                <a:solidFill>
+                  <a:srgbClr val="202b33"/>
+                </a:solidFill>
+                <a:latin typeface="Arial"/>
+                <a:ea typeface="Arial"/>
+                <a:cs typeface="Arial"/>
+              </a:rPr>
+              <a:t xml:space="preserve">Which raises the question this room should actually be arguing about. Should OpenAI and Anthropic end up owning every software channel? Watch what happens when the assistants ship real-time collaboration: who spends less time in email, Slack and Google Docs then? I can already make and edit images and video in ways that make me less likely to open Photoshop or DaVinci. If I need a jingle for the company, I ask Suno and it is done. So is everything you spent a lifetime learning, mastering and fighting with about to be irrelevant? Yes. At least as you know it.</a:t>
+            </a:r>
+            <a:endParaRPr lang="en-US" sz="1200"/>
+          </a:p>
+          <a:p>
+            <a:pPr marL="0" indent="0">
+              <a:lnSpc>
+                <a:spcPts val="1560"/>
+              </a:lnSpc>
+              <a:spcAft>
+                <a:spcPts val="0"/>
+              </a:spcAft>
+              <a:buNone/>
+            </a:pPr>
+            <a:r>
+              <a:rPr lang="en-US" sz="1200" b="0">
+                <a:solidFill>
+                  <a:srgbClr val="202b33"/>
+                </a:solidFill>
+                <a:latin typeface="Arial"/>
+                <a:ea typeface="Arial"/>
+                <a:cs typeface="Arial"/>
+              </a:rPr>
+              <a:t xml:space="preserve"/>
+            </a:r>
+            <a:endParaRPr lang="en-US" sz="1200"/>
+          </a:p>
+          <a:p>
+            <a:pPr marL="0" indent="0">
+              <a:lnSpc>
+                <a:spcPts val="1560"/>
+              </a:lnSpc>
+              <a:spcAft>
+                <a:spcPts val="0"/>
+              </a:spcAft>
+              <a:buNone/>
+            </a:pPr>
+            <a:r>
+              <a:rPr lang="en-US" sz="1200" b="0">
+                <a:solidFill>
+                  <a:srgbClr val="202b33"/>
+                </a:solidFill>
+                <a:latin typeface="Arial"/>
+                <a:ea typeface="Arial"/>
+                <a:cs typeface="Arial"/>
+              </a:rPr>
+              <a:t xml:space="preserve">What replaces it looks less like a grid of apps and more like Minority Report, with a surprise revival of the terminal. Which is a Matrix ending when you think about it. Thanks, AI. Skynet is not so bad if I get to keep my CLIs.</a:t>
+            </a:r>
+            <a:endParaRPr lang="en-US" sz="1200"/>
+          </a:p>
+          <a:p>
+            <a:pPr marL="0" indent="0">
+              <a:lnSpc>
+                <a:spcPts val="1560"/>
+              </a:lnSpc>
+              <a:spcAft>
+                <a:spcPts val="0"/>
+              </a:spcAft>
+              <a:buNone/>
+            </a:pPr>
+            <a:r>
+              <a:rPr lang="en-US" sz="1200" b="0">
+                <a:solidFill>
+                  <a:srgbClr val="202b33"/>
+                </a:solidFill>
+                <a:latin typeface="Arial"/>
+                <a:ea typeface="Arial"/>
+                <a:cs typeface="Arial"/>
+              </a:rPr>
+              <a:t xml:space="preserve"/>
+            </a:r>
+            <a:endParaRPr lang="en-US" sz="1200"/>
+          </a:p>
+          <a:p>
+            <a:pPr marL="0" indent="0">
+              <a:lnSpc>
+                <a:spcPts val="1560"/>
+              </a:lnSpc>
+              <a:spcAft>
+                <a:spcPts val="0"/>
+              </a:spcAft>
+              <a:buNone/>
+            </a:pPr>
+            <a:r>
+              <a:rPr lang="en-US" sz="1200" b="0">
+                <a:solidFill>
+                  <a:srgbClr val="202b33"/>
+                </a:solidFill>
+                <a:latin typeface="Arial"/>
+                <a:ea typeface="Arial"/>
+                <a:cs typeface="Arial"/>
+              </a:rPr>
+              <a:t xml:space="preserve">Here is the part I want you to leave with. That future is not spoken for. GPT image being pretty good does not mean the story of image creation belongs to the big players, and the same is true in whichever industry you work in. Those of us who do not work at a frontier lab, the organic agents in the room, get to rethink any and every app as an AI-native system from the boundary up. That is this whole talk one level higher: do not photocopy today's product categories onto tomorrow's substrate either.</a:t>
+            </a:r>
+            <a:endParaRPr lang="en-US" sz="1200"/>
+          </a:p>
+          <a:p>
+            <a:pPr marL="0" indent="0">
+              <a:lnSpc>
+                <a:spcPts val="1560"/>
+              </a:lnSpc>
+              <a:spcAft>
+                <a:spcPts val="0"/>
+              </a:spcAft>
+              <a:buNone/>
+            </a:pPr>
+            <a:r>
+              <a:rPr lang="en-US" sz="1200" b="0">
+                <a:solidFill>
+                  <a:srgbClr val="202b33"/>
+                </a:solidFill>
+                <a:latin typeface="Arial"/>
+                <a:ea typeface="Arial"/>
+                <a:cs typeface="Arial"/>
+              </a:rPr>
+              <a:t xml:space="preserve"/>
+            </a:r>
+            <a:endParaRPr lang="en-US" sz="1200"/>
+          </a:p>
+          <a:p>
+            <a:pPr marL="0" indent="0">
+              <a:lnSpc>
+                <a:spcPts val="1560"/>
+              </a:lnSpc>
+              <a:spcAft>
+                <a:spcPts val="0"/>
+              </a:spcAft>
+              <a:buNone/>
+            </a:pPr>
+            <a:r>
+              <a:rPr lang="en-US" sz="1200" b="0">
+                <a:solidFill>
+                  <a:srgbClr val="202b33"/>
+                </a:solidFill>
+                <a:latin typeface="Arial"/>
+                <a:ea typeface="Arial"/>
+                <a:cs typeface="Arial"/>
+              </a:rPr>
+              <a:t xml:space="preserve">Stage direction: Ask which product they use daily that would not survive somebody else rebuilding it AI-native. Take one answer. Do not resolve it.</a:t>
+            </a:r>
+            <a:endParaRPr lang="en-US" sz="1200"/>
+          </a:p>
+          <a:p>
+            <a:pPr marL="0" indent="0">
+              <a:lnSpc>
+                <a:spcPts val="1560"/>
+              </a:lnSpc>
+              <a:spcAft>
+                <a:spcPts val="0"/>
+              </a:spcAft>
+              <a:buNone/>
+            </a:pPr>
+            <a:r>
+              <a:rPr lang="en-US" sz="1200" b="0">
+                <a:solidFill>
+                  <a:srgbClr val="202b33"/>
+                </a:solidFill>
+                <a:latin typeface="Arial"/>
+                <a:ea typeface="Arial"/>
+                <a:cs typeface="Arial"/>
+              </a:rPr>
+              <a:t xml:space="preserve"/>
+            </a:r>
+            <a:endParaRPr lang="en-US" sz="1200"/>
+          </a:p>
+          <a:p>
+            <a:pPr marL="0" indent="0">
+              <a:lnSpc>
+                <a:spcPts val="1560"/>
+              </a:lnSpc>
+              <a:spcAft>
+                <a:spcPts val="0"/>
+              </a:spcAft>
+              <a:buNone/>
+            </a:pPr>
+            <a:r>
+              <a:rPr lang="en-US" sz="1200" b="0">
+                <a:solidFill>
+                  <a:srgbClr val="202b33"/>
+                </a:solidFill>
+                <a:latin typeface="Arial"/>
+                <a:ea typeface="Arial"/>
+                <a:cs typeface="Arial"/>
+              </a:rPr>
+              <a:t xml:space="preserve"/>
+            </a:r>
+            <a:endParaRPr lang="en-US" sz="1200"/>
+          </a:p>
+        </p:txBody>
+      </p:sp>
+    </p:spTree>
+  </p:cSld>
+  <p:clrMapOvr>
+    <a:masterClrMapping/>
+  </p:clrMapOvr>
+</p:notes>
+</file>
+
+<file path=ppt/notesSlides/notesSlide16.xml><?xml version="1.0" encoding="utf-8"?>
+<p:notes xmlns:a="http://schemas.openxmlformats.org/drawingml/2006/main" xmlns:r="http://schemas.openxmlformats.org/officeDocument/2006/relationships" xmlns:p="http://schemas.openxmlformats.org/presentationml/2006/main">
+  <p:cSld>
+    <p:spTree>
+      <p:nvGrpSpPr>
+        <p:cNvPr id="1" name=""/>
+        <p:cNvGrpSpPr/>
+        <p:nvPr/>
+      </p:nvGrpSpPr>
+      <p:grpSpPr>
+        <a:xfrm>
+          <a:off x="0" y="0"/>
+          <a:ext cx="0" cy="0"/>
+          <a:chOff x="0" y="0"/>
+          <a:chExt cx="0" cy="0"/>
+        </a:xfrm>
+      </p:grpSpPr>
+      <p:sp>
+        <p:nvSpPr>
+          <p:cNvPr id="2" name="Presenter notes"/>
+          <p:cNvSpPr txBox="1"/>
+          <p:nvPr>
+            <p:ph type="body" idx="1"/>
+          </p:nvPr>
+        </p:nvSpPr>
+        <p:spPr>
+          <a:xfrm>
+            <a:off x="457200" y="1428750"/>
+            <a:ext cx="5715000" cy="6667500"/>
+          </a:xfrm>
+        </p:spPr>
+        <p:txBody>
+          <a:bodyPr/>
+          <a:lstStyle/>
+          <a:p>
+            <a:pPr marL="0" indent="0">
+              <a:lnSpc>
+                <a:spcPts val="1560"/>
+              </a:lnSpc>
+              <a:spcAft>
+                <a:spcPts val="0"/>
+              </a:spcAft>
+              <a:buNone/>
+            </a:pPr>
+            <a:r>
+              <a:rPr lang="en-US" sz="1200" b="0">
+                <a:solidFill>
+                  <a:srgbClr val="202b33"/>
+                </a:solidFill>
+                <a:latin typeface="Arial"/>
+                <a:ea typeface="Arial"/>
+                <a:cs typeface="Arial"/>
+              </a:rPr>
+              <a:t xml:space="preserve">Every experiment reports its hypothesis</a:t>
+            </a:r>
+            <a:endParaRPr lang="en-US" sz="1200"/>
+          </a:p>
+          <a:p>
+            <a:pPr marL="0" indent="0">
+              <a:lnSpc>
+                <a:spcPts val="1560"/>
+              </a:lnSpc>
+              <a:spcAft>
+                <a:spcPts val="0"/>
+              </a:spcAft>
+              <a:buNone/>
+            </a:pPr>
+            <a:r>
+              <a:rPr lang="en-US" sz="1200" b="0">
+                <a:solidFill>
+                  <a:srgbClr val="202b33"/>
+                </a:solidFill>
+                <a:latin typeface="Arial"/>
+                <a:ea typeface="Arial"/>
+                <a:cs typeface="Arial"/>
+              </a:rPr>
+              <a:t xml:space="preserve"/>
+            </a:r>
+            <a:endParaRPr lang="en-US" sz="1200"/>
+          </a:p>
+          <a:p>
+            <a:pPr marL="0" indent="0">
+              <a:lnSpc>
+                <a:spcPts val="1560"/>
+              </a:lnSpc>
+              <a:spcAft>
+                <a:spcPts val="0"/>
+              </a:spcAft>
+              <a:buNone/>
+            </a:pPr>
+            <a:r>
+              <a:rPr lang="en-US" sz="1200" b="0">
+                <a:solidFill>
+                  <a:srgbClr val="202b33"/>
+                </a:solidFill>
+                <a:latin typeface="Arial"/>
+                <a:ea typeface="Arial"/>
+                <a:cs typeface="Arial"/>
+              </a:rPr>
+              <a:t xml:space="preserve">35:30 to 37:30 · land</a:t>
+            </a:r>
+            <a:endParaRPr lang="en-US" sz="1200"/>
+          </a:p>
+          <a:p>
+            <a:pPr marL="0" indent="0">
+              <a:lnSpc>
+                <a:spcPts val="1560"/>
+              </a:lnSpc>
+              <a:spcAft>
+                <a:spcPts val="0"/>
+              </a:spcAft>
+              <a:buNone/>
+            </a:pPr>
+            <a:r>
+              <a:rPr lang="en-US" sz="1200" b="0">
+                <a:solidFill>
+                  <a:srgbClr val="202b33"/>
+                </a:solidFill>
+                <a:latin typeface="Arial"/>
+                <a:ea typeface="Arial"/>
+                <a:cs typeface="Arial"/>
+              </a:rPr>
+              <a:t xml:space="preserve"/>
+            </a:r>
+            <a:endParaRPr lang="en-US" sz="1200"/>
+          </a:p>
+          <a:p>
+            <a:pPr marL="0" indent="0">
+              <a:lnSpc>
+                <a:spcPts val="1560"/>
+              </a:lnSpc>
+              <a:spcAft>
+                <a:spcPts val="0"/>
+              </a:spcAft>
+              <a:buNone/>
+            </a:pPr>
+            <a:r>
+              <a:rPr lang="en-US" sz="1200" b="0">
+                <a:solidFill>
+                  <a:srgbClr val="202b33"/>
+                </a:solidFill>
+                <a:latin typeface="Arial"/>
+                <a:ea typeface="Arial"/>
+                <a:cs typeface="Arial"/>
+              </a:rPr>
+              <a:t xml:space="preserve">&gt; If we do X, we expect Y to move</a:t>
+            </a:r>
+            <a:endParaRPr lang="en-US" sz="1200"/>
+          </a:p>
+          <a:p>
+            <a:pPr marL="0" indent="0">
+              <a:lnSpc>
+                <a:spcPts val="1560"/>
+              </a:lnSpc>
+              <a:spcAft>
+                <a:spcPts val="0"/>
+              </a:spcAft>
+              <a:buNone/>
+            </a:pPr>
+            <a:r>
+              <a:rPr lang="en-US" sz="1200" b="0">
+                <a:solidFill>
+                  <a:srgbClr val="202b33"/>
+                </a:solidFill>
+                <a:latin typeface="Arial"/>
+                <a:ea typeface="Arial"/>
+                <a:cs typeface="Arial"/>
+              </a:rPr>
+              <a:t xml:space="preserve">&gt; Report success, failure, and surprise where the team looks</a:t>
+            </a:r>
+            <a:endParaRPr lang="en-US" sz="1200"/>
+          </a:p>
+          <a:p>
+            <a:pPr marL="0" indent="0">
+              <a:lnSpc>
+                <a:spcPts val="1560"/>
+              </a:lnSpc>
+              <a:spcAft>
+                <a:spcPts val="0"/>
+              </a:spcAft>
+              <a:buNone/>
+            </a:pPr>
+            <a:r>
+              <a:rPr lang="en-US" sz="1200" b="0">
+                <a:solidFill>
+                  <a:srgbClr val="202b33"/>
+                </a:solidFill>
+                <a:latin typeface="Arial"/>
+                <a:ea typeface="Arial"/>
+                <a:cs typeface="Arial"/>
+              </a:rPr>
+              <a:t xml:space="preserve"/>
+            </a:r>
+            <a:endParaRPr lang="en-US" sz="1200"/>
+          </a:p>
+          <a:p>
+            <a:pPr marL="0" indent="0">
+              <a:lnSpc>
+                <a:spcPts val="1560"/>
+              </a:lnSpc>
+              <a:spcAft>
+                <a:spcPts val="0"/>
+              </a:spcAft>
+              <a:buNone/>
+            </a:pPr>
+            <a:r>
+              <a:rPr lang="en-US" sz="1200" b="0">
+                <a:solidFill>
+                  <a:srgbClr val="202b33"/>
+                </a:solidFill>
+                <a:latin typeface="Arial"/>
+                <a:ea typeface="Arial"/>
+                <a:cs typeface="Arial"/>
+              </a:rPr>
+              <a:t xml:space="preserve">Every beta, ad test, and feature flag gets a hypothesis. If we change this, we expect that to increase. State who it is for, what would make us stop, and when we will look.</a:t>
+            </a:r>
+            <a:endParaRPr lang="en-US" sz="1200"/>
+          </a:p>
+          <a:p>
+            <a:pPr marL="0" indent="0">
+              <a:lnSpc>
+                <a:spcPts val="1560"/>
+              </a:lnSpc>
+              <a:spcAft>
+                <a:spcPts val="0"/>
+              </a:spcAft>
+              <a:buNone/>
+            </a:pPr>
+            <a:r>
+              <a:rPr lang="en-US" sz="1200" b="0">
+                <a:solidFill>
+                  <a:srgbClr val="202b33"/>
+                </a:solidFill>
+                <a:latin typeface="Arial"/>
+                <a:ea typeface="Arial"/>
+                <a:cs typeface="Arial"/>
+              </a:rPr>
+              <a:t xml:space="preserve"/>
+            </a:r>
+            <a:endParaRPr lang="en-US" sz="1200"/>
+          </a:p>
+          <a:p>
+            <a:pPr marL="0" indent="0">
+              <a:lnSpc>
+                <a:spcPts val="1560"/>
+              </a:lnSpc>
+              <a:spcAft>
+                <a:spcPts val="0"/>
+              </a:spcAft>
+              <a:buNone/>
+            </a:pPr>
+            <a:r>
+              <a:rPr lang="en-US" sz="1200" b="0">
+                <a:solidFill>
+                  <a:srgbClr val="202b33"/>
+                </a:solidFill>
+                <a:latin typeface="Arial"/>
+                <a:ea typeface="Arial"/>
+                <a:cs typeface="Arial"/>
+              </a:rPr>
+              <a:t xml:space="preserve">Generate the measurement with the change. It needs the exposure count, the intended outcome, the unwanted outcomes, and the owner who will act, and it goes where the team already looks. Remembering to check a dashboard is a bad dependency.</a:t>
+            </a:r>
+            <a:endParaRPr lang="en-US" sz="1200"/>
+          </a:p>
+          <a:p>
+            <a:pPr marL="0" indent="0">
+              <a:lnSpc>
+                <a:spcPts val="1560"/>
+              </a:lnSpc>
+              <a:spcAft>
+                <a:spcPts val="0"/>
+              </a:spcAft>
+              <a:buNone/>
+            </a:pPr>
+            <a:r>
+              <a:rPr lang="en-US" sz="1200" b="0">
+                <a:solidFill>
+                  <a:srgbClr val="202b33"/>
+                </a:solidFill>
+                <a:latin typeface="Arial"/>
+                <a:ea typeface="Arial"/>
+                <a:cs typeface="Arial"/>
+              </a:rPr>
+              <a:t xml:space="preserve"/>
+            </a:r>
+            <a:endParaRPr lang="en-US" sz="1200"/>
+          </a:p>
+          <a:p>
+            <a:pPr marL="0" indent="0">
+              <a:lnSpc>
+                <a:spcPts val="1560"/>
+              </a:lnSpc>
+              <a:spcAft>
+                <a:spcPts val="0"/>
+              </a:spcAft>
+              <a:buNone/>
+            </a:pPr>
+            <a:r>
+              <a:rPr lang="en-US" sz="1200" b="0">
+                <a:solidFill>
+                  <a:srgbClr val="202b33"/>
+                </a:solidFill>
+                <a:latin typeface="Arial"/>
+                <a:ea typeface="Arial"/>
+                <a:cs typeface="Arial"/>
+              </a:rPr>
+              <a:t xml:space="preserve">Take the handoff you named near the start. Write the artifact an agent would produce, who receives it, and the observation that would make them reject it. If that last field is blank, you have designed a suggestion machine.</a:t>
+            </a:r>
+            <a:endParaRPr lang="en-US" sz="1200"/>
+          </a:p>
+          <a:p>
+            <a:pPr marL="0" indent="0">
+              <a:lnSpc>
+                <a:spcPts val="1560"/>
+              </a:lnSpc>
+              <a:spcAft>
+                <a:spcPts val="0"/>
+              </a:spcAft>
+              <a:buNone/>
+            </a:pPr>
+            <a:r>
+              <a:rPr lang="en-US" sz="1200" b="0">
+                <a:solidFill>
+                  <a:srgbClr val="202b33"/>
+                </a:solidFill>
+                <a:latin typeface="Arial"/>
+                <a:ea typeface="Arial"/>
+                <a:cs typeface="Arial"/>
+              </a:rPr>
+              <a:t xml:space="preserve"/>
+            </a:r>
+            <a:endParaRPr lang="en-US" sz="1200"/>
+          </a:p>
+          <a:p>
+            <a:pPr marL="0" indent="0">
+              <a:lnSpc>
+                <a:spcPts val="1560"/>
+              </a:lnSpc>
+              <a:spcAft>
+                <a:spcPts val="0"/>
+              </a:spcAft>
+              <a:buNone/>
+            </a:pPr>
+            <a:r>
+              <a:rPr lang="en-US" sz="1200" b="0">
+                <a:solidFill>
+                  <a:srgbClr val="202b33"/>
+                </a:solidFill>
+                <a:latin typeface="Arial"/>
+                <a:ea typeface="Arial"/>
+                <a:cs typeface="Arial"/>
+              </a:rPr>
+              <a:t xml:space="preserve">Stage direction: Give 45 seconds to write. Walk through one answer for the remaining discussion time.</a:t>
+            </a:r>
+            <a:endParaRPr lang="en-US" sz="1200"/>
+          </a:p>
+          <a:p>
+            <a:pPr marL="0" indent="0">
+              <a:lnSpc>
+                <a:spcPts val="1560"/>
+              </a:lnSpc>
+              <a:spcAft>
+                <a:spcPts val="0"/>
+              </a:spcAft>
+              <a:buNone/>
+            </a:pPr>
+            <a:r>
+              <a:rPr lang="en-US" sz="1200" b="0">
+                <a:solidFill>
+                  <a:srgbClr val="202b33"/>
+                </a:solidFill>
+                <a:latin typeface="Arial"/>
+                <a:ea typeface="Arial"/>
+                <a:cs typeface="Arial"/>
+              </a:rPr>
+              <a:t xml:space="preserve"/>
+            </a:r>
+            <a:endParaRPr lang="en-US" sz="1200"/>
+          </a:p>
+          <a:p>
+            <a:pPr marL="0" indent="0">
+              <a:lnSpc>
+                <a:spcPts val="1560"/>
+              </a:lnSpc>
+              <a:spcAft>
+                <a:spcPts val="0"/>
+              </a:spcAft>
+              <a:buNone/>
+            </a:pPr>
+            <a:r>
+              <a:rPr lang="en-US" sz="1200" b="0">
+                <a:solidFill>
+                  <a:srgbClr val="202b33"/>
+                </a:solidFill>
+                <a:latin typeface="Arial"/>
+                <a:ea typeface="Arial"/>
+                <a:cs typeface="Arial"/>
+              </a:rPr>
+              <a:t xml:space="preserve">Source: Microsoft ExP (2020), [Patterns of trustworthy experimentation: pre-experiment stage](https://www.microsoft.com/en-us/research/articles/patterns-of-trustworthy-experimentation-pre-experiment-stage/).</a:t>
+            </a:r>
+            <a:endParaRPr lang="en-US" sz="1200"/>
+          </a:p>
+          <a:p>
+            <a:pPr marL="0" indent="0">
+              <a:lnSpc>
+                <a:spcPts val="1560"/>
+              </a:lnSpc>
+              <a:spcAft>
+                <a:spcPts val="0"/>
+              </a:spcAft>
+              <a:buNone/>
+            </a:pPr>
+            <a:r>
+              <a:rPr lang="en-US" sz="1200" b="0">
+                <a:solidFill>
+                  <a:srgbClr val="202b33"/>
+                </a:solidFill>
+                <a:latin typeface="Arial"/>
+                <a:ea typeface="Arial"/>
+                <a:cs typeface="Arial"/>
+              </a:rPr>
+              <a:t xml:space="preserve"/>
+            </a:r>
+            <a:endParaRPr lang="en-US" sz="1200"/>
+          </a:p>
+          <a:p>
+            <a:pPr marL="0" indent="0">
+              <a:lnSpc>
+                <a:spcPts val="1560"/>
+              </a:lnSpc>
+              <a:spcAft>
+                <a:spcPts val="0"/>
+              </a:spcAft>
+              <a:buNone/>
+            </a:pPr>
+            <a:r>
+              <a:rPr lang="en-US" sz="1200" b="0">
+                <a:solidFill>
+                  <a:srgbClr val="202b33"/>
+                </a:solidFill>
+                <a:latin typeface="Arial"/>
+                <a:ea typeface="Arial"/>
+                <a:cs typeface="Arial"/>
+              </a:rPr>
+              <a:t xml:space="preserve"/>
+            </a:r>
+            <a:endParaRPr lang="en-US" sz="1200"/>
+          </a:p>
+        </p:txBody>
+      </p:sp>
+    </p:spTree>
+  </p:cSld>
+  <p:clrMapOvr>
+    <a:masterClrMapping/>
+  </p:clrMapOvr>
+</p:notes>
+</file>
+
+<file path=ppt/notesSlides/notesSlide17.xml><?xml version="1.0" encoding="utf-8"?>
+<p:notes xmlns:a="http://schemas.openxmlformats.org/drawingml/2006/main" xmlns:r="http://schemas.openxmlformats.org/officeDocument/2006/relationships" xmlns:p="http://schemas.openxmlformats.org/presentationml/2006/main">
+  <p:cSld>
+    <p:spTree>
+      <p:nvGrpSpPr>
+        <p:cNvPr id="1" name=""/>
+        <p:cNvGrpSpPr/>
+        <p:nvPr/>
+      </p:nvGrpSpPr>
+      <p:grpSpPr>
+        <a:xfrm>
+          <a:off x="0" y="0"/>
+          <a:ext cx="0" cy="0"/>
+          <a:chOff x="0" y="0"/>
+          <a:chExt cx="0" cy="0"/>
+        </a:xfrm>
+      </p:grpSpPr>
+      <p:sp>
+        <p:nvSpPr>
+          <p:cNvPr id="2" name="Presenter notes"/>
+          <p:cNvSpPr txBox="1"/>
+          <p:nvPr>
+            <p:ph type="body" idx="1"/>
+          </p:nvPr>
+        </p:nvSpPr>
+        <p:spPr>
+          <a:xfrm>
+            <a:off x="457200" y="1428750"/>
+            <a:ext cx="5715000" cy="6667500"/>
+          </a:xfrm>
+        </p:spPr>
+        <p:txBody>
+          <a:bodyPr/>
+          <a:lstStyle/>
+          <a:p>
+            <a:pPr marL="0" indent="0">
+              <a:lnSpc>
+                <a:spcPts val="1560"/>
+              </a:lnSpc>
+              <a:spcAft>
+                <a:spcPts val="0"/>
+              </a:spcAft>
+              <a:buNone/>
+            </a:pPr>
+            <a:r>
+              <a:rPr lang="en-US" sz="1200" b="0">
+                <a:solidFill>
+                  <a:srgbClr val="202b33"/>
+                </a:solidFill>
+                <a:latin typeface="Arial"/>
+                <a:ea typeface="Arial"/>
+                <a:cs typeface="Arial"/>
+              </a:rPr>
               <a:t xml:space="preserve">Break the mirror on purpose</a:t>
             </a:r>
             <a:endParaRPr lang="en-US" sz="1200"/>
@@ -2786,7 +3842,7 @@
                 <a:ea typeface="Arial"/>
                 <a:cs typeface="Arial"/>
               </a:rPr>
-              <a:t xml:space="preserve">37:00 to 40:00 · land</a:t>
+              <a:t xml:space="preserve">37:30 to 40:00 · land</a:t>
             </a:r>
             <a:endParaRPr lang="en-US" sz="1200"/>
           </a:p>
@@ -2947,7 +4003,7 @@
                 <a:ea typeface="Arial"/>
                 <a:cs typeface="Arial"/>
               </a:rPr>
-              <a:t xml:space="preserve">Take one boundary. What arrives, what leaves, who decides, and what did it cost last week? Make collection cheaper without erasing the disagreement that the handoff used to expose. Keep the product review where the evidence conflicts. Give the resulting decision a durable artifact so the next agent does not have to guess.</a:t>
+              <a:t xml:space="preserve">Take one boundary. What arrives, what leaves, who decides, and what did it cost last week? Make collection cheaper without erasing the disagreement the handoff used to expose. Keep the product review where the evidence conflicts, and give the decision a durable artifact so the next agent does not have to guess.</a:t>
             </a:r>
             <a:endParaRPr lang="en-US" sz="1200"/>
           </a:p>
@@ -2993,7 +4049,7 @@
                 <a:ea typeface="Arial"/>
                 <a:cs typeface="Arial"/>
               </a:rPr>
-              <a:t xml:space="preserve">Then price ownership. Six agents do not become free because one person has their names in a config file. Reserve the person's attention and practise the exceptional work. Put permission before customer consequences.</a:t>
+              <a:t xml:space="preserve">Then price ownership, and price the fuel. Six agents do not become free because one person has their names in a config file, and neither does the burn that keeps them running. Put permission before customer consequences.</a:t>
             </a:r>
             <a:endParaRPr lang="en-US" sz="1200"/>
           </a:p>
@@ -3039,7 +4095,7 @@
                 <a:ea typeface="Arial"/>
                 <a:cs typeface="Arial"/>
               </a:rPr>
-              <a:t xml:space="preserve">The org chart is a record of earlier tradeoffs. You are allowed to make new ones. Automate the right things. Keep the taste.</a:t>
+              <a:t xml:space="preserve">And then do the larger version of the same move. The org chart is a record of earlier tradeoffs; so is the product category you are working inside. You are allowed to make new ones, and the channel is not spoken for yet. Break the mirror on purpose. Automate the right things. Keep the taste.</a:t>
             </a:r>
             <a:endParaRPr lang="en-US" sz="1200"/>
           </a:p>
@@ -3244,7 +4300,7 @@
                 <a:ea typeface="Arial"/>
                 <a:cs typeface="Arial"/>
               </a:rPr>
-              <a:t xml:space="preserve">&gt; Firm/industry descriptive studies: 70% strong, 22% partial, 8% no support</a:t>
+              <a:t xml:space="preserve">&gt; Mostly supported, with a documented minority that was not</a:t>
             </a:r>
             <a:endParaRPr lang="en-US" sz="1200"/>
           </a:p>
@@ -3290,7 +4346,7 @@
                 <a:ea typeface="Arial"/>
                 <a:cs typeface="Arial"/>
               </a:rPr>
-              <a:t xml:space="preserve">Colfer and Baldwin reviewed 142 empirical studies. The firm and industry descriptive studies mostly supported mirroring: seventy percent strongly, twenty-two percent partially, eight percent not at all. The open collaborative projects looked different. Do not turn that into a claim that one third of companies broke Conway's law.</a:t>
+              <a:t xml:space="preserve">Colfer and Baldwin reviewed 142 empirical studies. The firm and industry descriptive studies mostly supported mirroring, with a documented minority that did not. Read the split off their table before you quote a percentage at anyone. The open collaborative projects looked different. Do not turn that into a claim that one third of companies broke Conway's law.</a:t>
             </a:r>
             <a:endParaRPr lang="en-US" sz="1200"/>
           </a:p>
@@ -4252,7 +5308,7 @@
                 <a:ea typeface="Arial"/>
                 <a:cs typeface="Arial"/>
               </a:rPr>
-              <a:t xml:space="preserve">Stage direction: Take 30 seconds: where is your team on the spectrum, and what is its heaviest handoff? Keep the answers for slide 14.</a:t>
+              <a:t xml:space="preserve">Stage direction: Take 30 seconds: where is your team on the spectrum, and what is its heaviest handoff? Keep the answers for the close.</a:t>
             </a:r>
             <a:endParaRPr lang="en-US" sz="1200"/>
           </a:p>
@@ -4892,7 +5948,7 @@
                 <a:ea typeface="Arial"/>
                 <a:cs typeface="Arial"/>
               </a:rPr>
-              <a:t xml:space="preserve">12:00 to 14:30 · build</a:t>
+              <a:t xml:space="preserve">12:00 to 14:00 · build</a:t>
             </a:r>
             <a:endParaRPr lang="en-US" sz="1200"/>
           </a:p>
@@ -5099,7 +6155,7 @@
                 <a:ea typeface="Arial"/>
                 <a:cs typeface="Arial"/>
               </a:rPr>
-              <a:t xml:space="preserve">Keep the review where somebody opens the source material and argues about what belongs at the top. It is the integrating interface in this system. Taste gets exercised in public there. A standing brief is useful; a dashboard nobody opens is just another place to store the mistake.</a:t>
+              <a:t xml:space="preserve">Keep the review where somebody opens the source material and argues about what belongs at the top. It is the integrating interface in this system. Taste gets exercised in public there.</a:t>
             </a:r>
             <a:endParaRPr lang="en-US" sz="1200"/>
           </a:p>
@@ -5304,7 +6360,7 @@
                 <a:ea typeface="Arial"/>
                 <a:cs typeface="Arial"/>
               </a:rPr>
-              <a:t xml:space="preserve">14:30 to 16:30 · build</a:t>
+              <a:t xml:space="preserve">14:00 to 15:00 · build</a:t>
             </a:r>
             <a:endParaRPr lang="en-US" sz="1200"/>
           </a:p>
@@ -5465,7 +6521,7 @@
                 <a:ea typeface="Arial"/>
                 <a:cs typeface="Arial"/>
               </a:rPr>
-              <a:t xml:space="preserve">Who estimated a ticket last week? Keep your hands up long enough to count. That is this room, not an industry survey. If half the room did it yesterday, then effort has left some rubrics and is alive in others.</a:t>
+              <a:t xml:space="preserve">We still have to choose what to ship. Even when the first implementation is cheap, rollout, review, customer support, and maintenance have costs. Put those beside evidence for the idea. Do not replace story points with a model's confidence and call that prioritization.</a:t>
             </a:r>
             <a:endParaRPr lang="en-US" sz="1200"/>
           </a:p>
@@ -5511,53 +6567,7 @@
                 <a:ea typeface="Arial"/>
                 <a:cs typeface="Arial"/>
               </a:rPr>
-              <a:t xml:space="preserve">We still have to choose what to ship. Even when the first implementation is cheap, rollout, review, customer support, and maintenance have costs. Put those beside evidence for the idea. Do not replace story points with a model's confidence and call that prioritization.</a:t>
-            </a:r>
-            <a:endParaRPr lang="en-US" sz="1200"/>
-          </a:p>
-          <a:p>
-            <a:pPr marL="0" indent="0">
-              <a:lnSpc>
-                <a:spcPts val="1560"/>
-              </a:lnSpc>
-              <a:spcAft>
-                <a:spcPts val="0"/>
-              </a:spcAft>
-              <a:buNone/>
-            </a:pPr>
-            <a:r>
-              <a:rPr lang="en-US" sz="1200" b="0">
-                <a:solidFill>
-                  <a:srgbClr val="202b33"/>
-                </a:solidFill>
-                <a:latin typeface="Arial"/>
-                <a:ea typeface="Arial"/>
-                <a:cs typeface="Arial"/>
-              </a:rPr>
-              <a:t xml:space="preserve"/>
-            </a:r>
-            <a:endParaRPr lang="en-US" sz="1200"/>
-          </a:p>
-          <a:p>
-            <a:pPr marL="0" indent="0">
-              <a:lnSpc>
-                <a:spcPts val="1560"/>
-              </a:lnSpc>
-              <a:spcAft>
-                <a:spcPts val="0"/>
-              </a:spcAft>
-              <a:buNone/>
-            </a:pPr>
-            <a:r>
-              <a:rPr lang="en-US" sz="1200" b="0">
-                <a:solidFill>
-                  <a:srgbClr val="202b33"/>
-                </a:solidFill>
-                <a:latin typeface="Arial"/>
-                <a:ea typeface="Arial"/>
-                <a:cs typeface="Arial"/>
-              </a:rPr>
-              <a:t xml:space="preserve">Stage direction: Count the hands and say the count without inventing a denominator. Confirm the first-person observation with Dan before delivery; if it no longer holds, start with the audience question.</a:t>
+              <a:t xml:space="preserve">Stage direction: Ask who estimated a ticket last week, take the show of hands, and say the count without inventing a denominator. Confirm the first-person observation with Dan before delivery; if it no longer holds, open with the question instead.</a:t>
             </a:r>
             <a:endParaRPr lang="en-US" sz="1200"/>
           </a:p>
@@ -5716,7 +6726,7 @@
                 <a:ea typeface="Arial"/>
                 <a:cs typeface="Arial"/>
               </a:rPr>
-              <a:t xml:space="preserve">16:30 to 18:30 · build</a:t>
+              <a:t xml:space="preserve">15:00 to 16:30 · build</a:t>
             </a:r>
             <a:endParaRPr lang="en-US" sz="1200"/>
           </a:p>
@@ -5923,7 +6933,7 @@
                 <a:ea typeface="Arial"/>
                 <a:cs typeface="Arial"/>
               </a:rPr>
-              <a:t xml:space="preserve">Analytics and warehouse queries can feed the same proposal queue. Marketing can draft an ad from an accepted idea. Those functions share provenance and owners; they do not all need write access to customer records.</a:t>
+              <a:t xml:space="preserve">Analytics, warehouse queries and marketing drafts feed the same queue. They share provenance and owners, and none of them needs write access to customer records.</a:t>
             </a:r>
             <a:endParaRPr lang="en-US" sz="1200"/>
           </a:p>
@@ -6082,7 +7092,7 @@
                 <a:ea typeface="Arial"/>
                 <a:cs typeface="Arial"/>
               </a:rPr>
-              <a:t xml:space="preserve">18:30 to 21:00 · build</a:t>
+              <a:t xml:space="preserve">16:30 to 18:30 · build</a:t>
             </a:r>
             <a:endParaRPr lang="en-US" sz="1200"/>
           </a:p>
@@ -6243,7 +7253,7 @@
                 <a:ea typeface="Arial"/>
                 <a:cs typeface="Arial"/>
               </a:rPr>
-              <a:t xml:space="preserve">The invitation explains what changes, that it is a beta, and how to turn it off. A person approves the message and recipients. Acceptance enrolls the customer behind a flag. Narrow feedback tells us what to try next; it does not automatically establish a causal improvement.</a:t>
+              <a:t xml:space="preserve">The invitation explains what changes, that it is a beta, and how to turn it off. A person approves the message and the recipients. Narrow feedback tells us what to try next; it does not establish a causal improvement.</a:t>
             </a:r>
             <a:endParaRPr lang="en-US" sz="1200"/>
           </a:p>
@@ -6990,7 +8000,7 @@
                 <a:ea typeface="Arial"/>
                 <a:cs typeface="Arial"/>
               </a:rPr>
-              <a:t xml:space="preserve">10 / 15    SOURCE SLIDE 10</a:t>
+              <a:t xml:space="preserve">10 / 17    SOURCE SLIDE 10</a:t>
             </a:r>
             <a:endParaRPr lang="en-US" sz="1350"/>
           </a:p>
@@ -7415,7 +8425,7 @@
                 <a:ea typeface="Arial"/>
                 <a:cs typeface="Arial"/>
               </a:rPr>
-              <a:t xml:space="preserve">11 / 15    SOURCE SLIDE 11</a:t>
+              <a:t xml:space="preserve">11 / 17    SOURCE SLIDE 11</a:t>
             </a:r>
             <a:endParaRPr lang="en-US" sz="1350"/>
           </a:p>
@@ -7938,7 +8948,7 @@
                 <a:ea typeface="Arial"/>
                 <a:cs typeface="Arial"/>
               </a:rPr>
-              <a:t xml:space="preserve">12 / 15    SOURCE SLIDE 12</a:t>
+              <a:t xml:space="preserve">12 / 17    SOURCE SLIDE 12</a:t>
             </a:r>
             <a:endParaRPr lang="en-US" sz="1350"/>
           </a:p>
@@ -8386,7 +9396,7 @@
                 <a:ea typeface="Arial"/>
                 <a:cs typeface="Arial"/>
               </a:rPr>
-              <a:t xml:space="preserve">13 / 15    SOURCE SLIDE 13</a:t>
+              <a:t xml:space="preserve">13 / 17    SOURCE SLIDE 13</a:t>
             </a:r>
             <a:endParaRPr lang="en-US" sz="1350"/>
           </a:p>
@@ -8811,7 +9821,7 @@
                 <a:ea typeface="Arial"/>
                 <a:cs typeface="Arial"/>
               </a:rPr>
-              <a:t xml:space="preserve">14 / 15    SOURCE SLIDE 14</a:t>
+              <a:t xml:space="preserve">14 / 17    SOURCE SLIDE 14</a:t>
             </a:r>
             <a:endParaRPr lang="en-US" sz="1350"/>
           </a:p>
@@ -8860,7 +9870,7 @@
                 <a:ea typeface="Arial"/>
                 <a:cs typeface="Arial"/>
               </a:rPr>
-              <a:t xml:space="preserve">Every experiment reports its hypothesis</a:t>
+              <a:t xml:space="preserve">Software Runs on Petrol Now</a:t>
             </a:r>
             <a:endParaRPr lang="en-US" sz="3900"/>
           </a:p>
@@ -8924,7 +9934,7 @@
         <p:spPr>
           <a:xfrm>
             <a:off x="2000250" y="2771775"/>
-            <a:ext cx="11029950" cy="539115"/>
+            <a:ext cx="11029950" cy="1059180"/>
           </a:xfrm>
           <a:prstGeom prst="rect">
             <a:avLst/>
@@ -8958,10 +9968,33 @@
                 <a:ea typeface="Arial"/>
                 <a:cs typeface="Arial"/>
               </a:rPr>
-              <a:t xml:space="preserve">If we do X, we expect Y to move</a:t>
+              <a:t xml:space="preserve">Tokens stop being a build cost and become a running</a:t>
             </a:r>
             <a:endParaRPr lang="en-US" sz="3150"/>
           </a:p>
+          <a:p>
+            <a:pPr marL="0" indent="0">
+              <a:lnSpc>
+                <a:spcPts val="4095"/>
+              </a:lnSpc>
+              <a:spcAft>
+                <a:spcPts val="0"/>
+              </a:spcAft>
+              <a:buNone/>
+            </a:pPr>
+            <a:r>
+              <a:rPr lang="en-US" sz="3150" b="0">
+                <a:solidFill>
+                  <a:srgbClr val="F5F1E9"/>
+                </a:solidFill>
+                <a:latin typeface="Arial"/>
+                <a:ea typeface="Arial"/>
+                <a:cs typeface="Arial"/>
+              </a:rPr>
+              <a:t xml:space="preserve">cost</a:t>
+            </a:r>
+            <a:endParaRPr lang="en-US" sz="3150"/>
+          </a:p>
         </p:txBody>
       </p:sp>
       <p:sp>
@@ -8972,7 +10005,7 @@
         </p:nvSpPr>
         <p:spPr>
           <a:xfrm>
-            <a:off x="685800" y="3558540"/>
+            <a:off x="685800" y="4078605"/>
             <a:ext cx="904875" cy="476250"/>
           </a:xfrm>
           <a:prstGeom prst="rect">
@@ -9021,7 +10054,7 @@
         </p:nvSpPr>
         <p:spPr>
           <a:xfrm>
-            <a:off x="2000250" y="3558540"/>
+            <a:off x="2000250" y="4078605"/>
             <a:ext cx="11029950" cy="1059180"/>
           </a:xfrm>
           <a:prstGeom prst="rect">
@@ -9056,7 +10089,7 @@
                 <a:ea typeface="Arial"/>
                 <a:cs typeface="Arial"/>
               </a:rPr>
-              <a:t xml:space="preserve">Report success, failure, and surprise where the team</a:t>
+              <a:t xml:space="preserve">Sentry bots hunting your own vulnerabilities, 24/7,</a:t>
             </a:r>
             <a:endParaRPr lang="en-US" sz="3150"/>
           </a:p>
@@ -9079,7 +10112,7 @@
                 <a:ea typeface="Arial"/>
                 <a:cs typeface="Arial"/>
               </a:rPr>
-              <a:t xml:space="preserve">looks</a:t>
+              <a:t xml:space="preserve">forever</a:t>
             </a:r>
             <a:endParaRPr lang="en-US" sz="3150"/>
           </a:p>
@@ -9093,8 +10126,8 @@
         </p:nvSpPr>
         <p:spPr>
           <a:xfrm>
-            <a:off x="457200" y="8286750"/>
-            <a:ext cx="12477750" cy="190500"/>
+            <a:off x="685800" y="5385435"/>
+            <a:ext cx="904875" cy="476250"/>
           </a:xfrm>
           <a:prstGeom prst="rect">
             <a:avLst/>
@@ -9112,6 +10145,127 @@
           <a:p>
             <a:pPr marL="0" indent="0">
               <a:lnSpc>
+                <a:spcPts val="2438"/>
+              </a:lnSpc>
+              <a:spcAft>
+                <a:spcPts val="0"/>
+              </a:spcAft>
+              <a:buNone/>
+            </a:pPr>
+            <a:r>
+              <a:rPr lang="en-US" sz="1875" b="0">
+                <a:solidFill>
+                  <a:srgbClr val="EFB45F"/>
+                </a:solidFill>
+                <a:latin typeface="Arial"/>
+                <a:ea typeface="Arial"/>
+                <a:cs typeface="Arial"/>
+              </a:rPr>
+              <a:t xml:space="preserve">03</a:t>
+            </a:r>
+            <a:endParaRPr lang="en-US" sz="1875"/>
+          </a:p>
+        </p:txBody>
+      </p:sp>
+      <p:sp>
+        <p:nvSpPr>
+          <p:cNvPr id="9" name="Text 9"/>
+          <p:cNvSpPr txBox="1"/>
+          <p:nvPr/>
+        </p:nvSpPr>
+        <p:spPr>
+          <a:xfrm>
+            <a:off x="2000250" y="5385435"/>
+            <a:ext cx="11029950" cy="1059180"/>
+          </a:xfrm>
+          <a:prstGeom prst="rect">
+            <a:avLst/>
+          </a:prstGeom>
+          <a:noFill/>
+          <a:ln>
+            <a:noFill/>
+          </a:ln>
+        </p:spPr>
+        <p:txBody>
+          <a:bodyPr wrap="none" lIns="0" tIns="0" rIns="0" bIns="0" anchor="t">
+            <a:noAutofit/>
+          </a:bodyPr>
+          <a:lstStyle/>
+          <a:p>
+            <a:pPr marL="0" indent="0">
+              <a:lnSpc>
+                <a:spcPts val="4095"/>
+              </a:lnSpc>
+              <a:spcAft>
+                <a:spcPts val="0"/>
+              </a:spcAft>
+              <a:buNone/>
+            </a:pPr>
+            <a:r>
+              <a:rPr lang="en-US" sz="3150" b="0">
+                <a:solidFill>
+                  <a:srgbClr val="F5F1E9"/>
+                </a:solidFill>
+                <a:latin typeface="Arial"/>
+                <a:ea typeface="Arial"/>
+                <a:cs typeface="Arial"/>
+              </a:rPr>
+              <a:t xml:space="preserve">Be careful firing the security bots. They know who</a:t>
+            </a:r>
+            <a:endParaRPr lang="en-US" sz="3150"/>
+          </a:p>
+          <a:p>
+            <a:pPr marL="0" indent="0">
+              <a:lnSpc>
+                <a:spcPts val="4095"/>
+              </a:lnSpc>
+              <a:spcAft>
+                <a:spcPts val="0"/>
+              </a:spcAft>
+              <a:buNone/>
+            </a:pPr>
+            <a:r>
+              <a:rPr lang="en-US" sz="3150" b="0">
+                <a:solidFill>
+                  <a:srgbClr val="F5F1E9"/>
+                </a:solidFill>
+                <a:latin typeface="Arial"/>
+                <a:ea typeface="Arial"/>
+                <a:cs typeface="Arial"/>
+              </a:rPr>
+              <a:t xml:space="preserve">you are.</a:t>
+            </a:r>
+            <a:endParaRPr lang="en-US" sz="3150"/>
+          </a:p>
+        </p:txBody>
+      </p:sp>
+      <p:sp>
+        <p:nvSpPr>
+          <p:cNvPr id="10" name="Text 10"/>
+          <p:cNvSpPr txBox="1"/>
+          <p:nvPr/>
+        </p:nvSpPr>
+        <p:spPr>
+          <a:xfrm>
+            <a:off x="457200" y="8286750"/>
+            <a:ext cx="12477750" cy="190500"/>
+          </a:xfrm>
+          <a:prstGeom prst="rect">
+            <a:avLst/>
+          </a:prstGeom>
+          <a:noFill/>
+          <a:ln>
+            <a:noFill/>
+          </a:ln>
+        </p:spPr>
+        <p:txBody>
+          <a:bodyPr wrap="none" lIns="0" tIns="0" rIns="0" bIns="0" anchor="t">
+            <a:noAutofit/>
+          </a:bodyPr>
+          <a:lstStyle/>
+          <a:p>
+            <a:pPr marL="0" indent="0">
+              <a:lnSpc>
                 <a:spcPts val="1268"/>
               </a:lnSpc>
               <a:spcAft>
@@ -9136,7 +10290,7 @@
       </p:sp>
       <p:sp>
         <p:nvSpPr>
-          <p:cNvPr id="9" name="Text 9"/>
+          <p:cNvPr id="11" name="Text 11"/>
           <p:cNvSpPr txBox="1"/>
           <p:nvPr/>
         </p:nvSpPr>
@@ -9259,7 +10413,7 @@
                 <a:ea typeface="Arial"/>
                 <a:cs typeface="Arial"/>
               </a:rPr>
-              <a:t xml:space="preserve">15 / 15    SOURCE SLIDE 15</a:t>
+              <a:t xml:space="preserve">15 / 17    SOURCE SLIDE 15</a:t>
             </a:r>
             <a:endParaRPr lang="en-US" sz="1350"/>
           </a:p>
@@ -9308,7 +10462,7 @@
                 <a:ea typeface="Arial"/>
                 <a:cs typeface="Arial"/>
               </a:rPr>
-              <a:t xml:space="preserve">Break the mirror on purpose</a:t>
+              <a:t xml:space="preserve">Minority Report, With Terminals</a:t>
             </a:r>
             <a:endParaRPr lang="en-US" sz="3900"/>
           </a:p>
@@ -9406,7 +10560,7 @@
                 <a:ea typeface="Arial"/>
                 <a:cs typeface="Arial"/>
               </a:rPr>
-              <a:t xml:space="preserve">Reprice the handoffs. Draw the interfaces.</a:t>
+              <a:t xml:space="preserve">Generated UI, adapting in real time, per person</a:t>
             </a:r>
             <a:endParaRPr lang="en-US" sz="3150"/>
           </a:p>
@@ -9470,7 +10624,7 @@
         <p:spPr>
           <a:xfrm>
             <a:off x="2000250" y="3558540"/>
-            <a:ext cx="11029950" cy="539115"/>
+            <a:ext cx="11029950" cy="1059180"/>
           </a:xfrm>
           <a:prstGeom prst="rect">
             <a:avLst/>
@@ -9504,10 +10658,33 @@
                 <a:ea typeface="Arial"/>
                 <a:cs typeface="Arial"/>
               </a:rPr>
-              <a:t xml:space="preserve">Automate the right things. Keep the taste.</a:t>
+              <a:t xml:space="preserve">Yes, the software you mastered is going away. As you</a:t>
             </a:r>
             <a:endParaRPr lang="en-US" sz="3150"/>
           </a:p>
+          <a:p>
+            <a:pPr marL="0" indent="0">
+              <a:lnSpc>
+                <a:spcPts val="4095"/>
+              </a:lnSpc>
+              <a:spcAft>
+                <a:spcPts val="0"/>
+              </a:spcAft>
+              <a:buNone/>
+            </a:pPr>
+            <a:r>
+              <a:rPr lang="en-US" sz="3150" b="0">
+                <a:solidFill>
+                  <a:srgbClr val="F5F1E9"/>
+                </a:solidFill>
+                <a:latin typeface="Arial"/>
+                <a:ea typeface="Arial"/>
+                <a:cs typeface="Arial"/>
+              </a:rPr>
+              <a:t xml:space="preserve">know it.</a:t>
+            </a:r>
+            <a:endParaRPr lang="en-US" sz="3150"/>
+          </a:p>
         </p:txBody>
       </p:sp>
       <p:sp>
@@ -9518,8 +10695,8 @@
         </p:nvSpPr>
         <p:spPr>
           <a:xfrm>
-            <a:off x="457200" y="8286750"/>
-            <a:ext cx="12477750" cy="190500"/>
+            <a:off x="685800" y="4865370"/>
+            <a:ext cx="904875" cy="476250"/>
           </a:xfrm>
           <a:prstGeom prst="rect">
             <a:avLst/>
@@ -9537,25 +10714,25 @@
           <a:p>
             <a:pPr marL="0" indent="0">
               <a:lnSpc>
-                <a:spcPts val="1268"/>
-              </a:lnSpc>
-              <a:spcAft>
-                <a:spcPts val="0"/>
-              </a:spcAft>
-              <a:buNone/>
-            </a:pPr>
-            <a:r>
-              <a:rPr lang="en-US" sz="975" b="0">
-                <a:solidFill>
-                  <a:srgbClr val="BEC9C6"/>
-                </a:solidFill>
-                <a:latin typeface="Arial"/>
-                <a:ea typeface="Arial"/>
-                <a:cs typeface="Arial"/>
-              </a:rPr>
-              <a:t xml:space="preserve">The Future of Product Engineering: Break the Mirror on Purpose</a:t>
-            </a:r>
-            <a:endParaRPr lang="en-US" sz="975"/>
+                <a:spcPts val="2438"/>
+              </a:lnSpc>
+              <a:spcAft>
+                <a:spcPts val="0"/>
+              </a:spcAft>
+              <a:buNone/>
+            </a:pPr>
+            <a:r>
+              <a:rPr lang="en-US" sz="1875" b="0">
+                <a:solidFill>
+                  <a:srgbClr val="EFB45F"/>
+                </a:solidFill>
+                <a:latin typeface="Arial"/>
+                <a:ea typeface="Arial"/>
+                <a:cs typeface="Arial"/>
+              </a:rPr>
+              <a:t xml:space="preserve">03</a:t>
+            </a:r>
+            <a:endParaRPr lang="en-US" sz="1875"/>
           </a:p>
         </p:txBody>
       </p:sp>
@@ -9567,8 +10744,8 @@
         </p:nvSpPr>
         <p:spPr>
           <a:xfrm>
-            <a:off x="13049250" y="8286750"/>
-            <a:ext cx="238125" cy="190500"/>
+            <a:off x="2000250" y="4865370"/>
+            <a:ext cx="11029950" cy="539115"/>
           </a:xfrm>
           <a:prstGeom prst="rect">
             <a:avLst/>
@@ -9586,6 +10763,55 @@
           <a:p>
             <a:pPr marL="0" indent="0">
               <a:lnSpc>
+                <a:spcPts val="4095"/>
+              </a:lnSpc>
+              <a:spcAft>
+                <a:spcPts val="0"/>
+              </a:spcAft>
+              <a:buNone/>
+            </a:pPr>
+            <a:r>
+              <a:rPr lang="en-US" sz="3150" b="0">
+                <a:solidFill>
+                  <a:srgbClr val="F5F1E9"/>
+                </a:solidFill>
+                <a:latin typeface="Arial"/>
+                <a:ea typeface="Arial"/>
+                <a:cs typeface="Arial"/>
+              </a:rPr>
+              <a:t xml:space="preserve">The channel is not spoken for.</a:t>
+            </a:r>
+            <a:endParaRPr lang="en-US" sz="3150"/>
+          </a:p>
+        </p:txBody>
+      </p:sp>
+      <p:sp>
+        <p:nvSpPr>
+          <p:cNvPr id="10" name="Text 10"/>
+          <p:cNvSpPr txBox="1"/>
+          <p:nvPr/>
+        </p:nvSpPr>
+        <p:spPr>
+          <a:xfrm>
+            <a:off x="457200" y="8286750"/>
+            <a:ext cx="12477750" cy="190500"/>
+          </a:xfrm>
+          <a:prstGeom prst="rect">
+            <a:avLst/>
+          </a:prstGeom>
+          <a:noFill/>
+          <a:ln>
+            <a:noFill/>
+          </a:ln>
+        </p:spPr>
+        <p:txBody>
+          <a:bodyPr wrap="none" lIns="0" tIns="0" rIns="0" bIns="0" anchor="t">
+            <a:noAutofit/>
+          </a:bodyPr>
+          <a:lstStyle/>
+          <a:p>
+            <a:pPr marL="0" indent="0">
+              <a:lnSpc>
                 <a:spcPts val="1268"/>
               </a:lnSpc>
               <a:spcAft>
@@ -9602,7 +10828,929 @@
                 <a:ea typeface="Arial"/>
                 <a:cs typeface="Arial"/>
               </a:rPr>
+              <a:t xml:space="preserve">The Future of Product Engineering: Break the Mirror on Purpose</a:t>
+            </a:r>
+            <a:endParaRPr lang="en-US" sz="975"/>
+          </a:p>
+        </p:txBody>
+      </p:sp>
+      <p:sp>
+        <p:nvSpPr>
+          <p:cNvPr id="11" name="Text 11"/>
+          <p:cNvSpPr txBox="1"/>
+          <p:nvPr/>
+        </p:nvSpPr>
+        <p:spPr>
+          <a:xfrm>
+            <a:off x="13049250" y="8286750"/>
+            <a:ext cx="238125" cy="190500"/>
+          </a:xfrm>
+          <a:prstGeom prst="rect">
+            <a:avLst/>
+          </a:prstGeom>
+          <a:noFill/>
+          <a:ln>
+            <a:noFill/>
+          </a:ln>
+        </p:spPr>
+        <p:txBody>
+          <a:bodyPr wrap="none" lIns="0" tIns="0" rIns="0" bIns="0" anchor="t">
+            <a:noAutofit/>
+          </a:bodyPr>
+          <a:lstStyle/>
+          <a:p>
+            <a:pPr marL="0" indent="0">
+              <a:lnSpc>
+                <a:spcPts val="1268"/>
+              </a:lnSpc>
+              <a:spcAft>
+                <a:spcPts val="0"/>
+              </a:spcAft>
+              <a:buNone/>
+            </a:pPr>
+            <a:r>
+              <a:rPr lang="en-US" sz="975" b="0">
+                <a:solidFill>
+                  <a:srgbClr val="BEC9C6"/>
+                </a:solidFill>
+                <a:latin typeface="Arial"/>
+                <a:ea typeface="Arial"/>
+                <a:cs typeface="Arial"/>
+              </a:rPr>
               <a:t xml:space="preserve">15</a:t>
+            </a:r>
+            <a:endParaRPr lang="en-US" sz="975"/>
+          </a:p>
+        </p:txBody>
+      </p:sp>
+    </p:spTree>
+  </p:cSld>
+  <p:clrMapOvr>
+    <a:masterClrMapping/>
+  </p:clrMapOvr>
+</p:sld>
+</file>
+
+<file path=ppt/slides/slide16.xml><?xml version="1.0" encoding="utf-8"?>
+<p:sld xmlns:a="http://schemas.openxmlformats.org/drawingml/2006/main" xmlns:r="http://schemas.openxmlformats.org/officeDocument/2006/relationships" xmlns:p="http://schemas.openxmlformats.org/presentationml/2006/main">
+  <p:cSld name="Slide 16">
+    <p:bg>
+      <p:bgPr>
+        <a:solidFill>
+          <a:srgbClr val="161D26"/>
+        </a:solidFill>
+        <a:effectLst/>
+      </p:bgPr>
+    </p:bg>
+    <p:spTree>
+      <p:nvGrpSpPr>
+        <p:cNvPr id="1" name=""/>
+        <p:cNvGrpSpPr/>
+        <p:nvPr/>
+      </p:nvGrpSpPr>
+      <p:grpSpPr>
+        <a:xfrm>
+          <a:off x="0" y="0"/>
+          <a:ext cx="0" cy="0"/>
+          <a:chOff x="0" y="0"/>
+          <a:chExt cx="0" cy="0"/>
+        </a:xfrm>
+      </p:grpSpPr>
+      <p:sp>
+        <p:nvSpPr>
+          <p:cNvPr id="2" name="Text 2"/>
+          <p:cNvSpPr txBox="1"/>
+          <p:nvPr/>
+        </p:nvSpPr>
+        <p:spPr>
+          <a:xfrm>
+            <a:off x="685800" y="381000"/>
+            <a:ext cx="12344400" cy="457200"/>
+          </a:xfrm>
+          <a:prstGeom prst="rect">
+            <a:avLst/>
+          </a:prstGeom>
+          <a:noFill/>
+          <a:ln>
+            <a:noFill/>
+          </a:ln>
+        </p:spPr>
+        <p:txBody>
+          <a:bodyPr wrap="none" lIns="0" tIns="0" rIns="0" bIns="0" anchor="t">
+            <a:noAutofit/>
+          </a:bodyPr>
+          <a:lstStyle/>
+          <a:p>
+            <a:pPr marL="0" indent="0">
+              <a:lnSpc>
+                <a:spcPts val="1755"/>
+              </a:lnSpc>
+              <a:spcAft>
+                <a:spcPts val="0"/>
+              </a:spcAft>
+              <a:buNone/>
+            </a:pPr>
+            <a:r>
+              <a:rPr lang="en-US" sz="1350" b="1">
+                <a:solidFill>
+                  <a:srgbClr val="EFB45F"/>
+                </a:solidFill>
+                <a:latin typeface="Arial"/>
+                <a:ea typeface="Arial"/>
+                <a:cs typeface="Arial"/>
+              </a:rPr>
+              <a:t xml:space="preserve">16 / 17    SOURCE SLIDE 16</a:t>
+            </a:r>
+            <a:endParaRPr lang="en-US" sz="1350"/>
+          </a:p>
+        </p:txBody>
+      </p:sp>
+      <p:sp>
+        <p:nvSpPr>
+          <p:cNvPr id="3" name="Text 3"/>
+          <p:cNvSpPr txBox="1"/>
+          <p:nvPr/>
+        </p:nvSpPr>
+        <p:spPr>
+          <a:xfrm>
+            <a:off x="685800" y="1057275"/>
+            <a:ext cx="12344400" cy="1381125"/>
+          </a:xfrm>
+          <a:prstGeom prst="rect">
+            <a:avLst/>
+          </a:prstGeom>
+          <a:noFill/>
+          <a:ln>
+            <a:noFill/>
+          </a:ln>
+        </p:spPr>
+        <p:txBody>
+          <a:bodyPr wrap="none" lIns="0" tIns="0" rIns="0" bIns="0" anchor="t">
+            <a:noAutofit/>
+          </a:bodyPr>
+          <a:lstStyle/>
+          <a:p>
+            <a:pPr marL="0" indent="0">
+              <a:lnSpc>
+                <a:spcPts val="4680"/>
+              </a:lnSpc>
+              <a:spcAft>
+                <a:spcPts val="0"/>
+              </a:spcAft>
+              <a:buNone/>
+            </a:pPr>
+            <a:r>
+              <a:rPr lang="en-US" sz="3900" b="1">
+                <a:solidFill>
+                  <a:srgbClr val="F5F1E9"/>
+                </a:solidFill>
+                <a:latin typeface="Arial"/>
+                <a:ea typeface="Arial"/>
+                <a:cs typeface="Arial"/>
+              </a:rPr>
+              <a:t xml:space="preserve">Every experiment reports its hypothesis</a:t>
+            </a:r>
+            <a:endParaRPr lang="en-US" sz="3900"/>
+          </a:p>
+        </p:txBody>
+      </p:sp>
+      <p:sp>
+        <p:nvSpPr>
+          <p:cNvPr id="4" name="Text 4"/>
+          <p:cNvSpPr txBox="1"/>
+          <p:nvPr/>
+        </p:nvSpPr>
+        <p:spPr>
+          <a:xfrm>
+            <a:off x="685800" y="2771775"/>
+            <a:ext cx="904875" cy="476250"/>
+          </a:xfrm>
+          <a:prstGeom prst="rect">
+            <a:avLst/>
+          </a:prstGeom>
+          <a:noFill/>
+          <a:ln>
+            <a:noFill/>
+          </a:ln>
+        </p:spPr>
+        <p:txBody>
+          <a:bodyPr wrap="none" lIns="0" tIns="0" rIns="0" bIns="0" anchor="t">
+            <a:noAutofit/>
+          </a:bodyPr>
+          <a:lstStyle/>
+          <a:p>
+            <a:pPr marL="0" indent="0">
+              <a:lnSpc>
+                <a:spcPts val="2438"/>
+              </a:lnSpc>
+              <a:spcAft>
+                <a:spcPts val="0"/>
+              </a:spcAft>
+              <a:buNone/>
+            </a:pPr>
+            <a:r>
+              <a:rPr lang="en-US" sz="1875" b="0">
+                <a:solidFill>
+                  <a:srgbClr val="EFB45F"/>
+                </a:solidFill>
+                <a:latin typeface="Arial"/>
+                <a:ea typeface="Arial"/>
+                <a:cs typeface="Arial"/>
+              </a:rPr>
+              <a:t xml:space="preserve">01</a:t>
+            </a:r>
+            <a:endParaRPr lang="en-US" sz="1875"/>
+          </a:p>
+        </p:txBody>
+      </p:sp>
+      <p:sp>
+        <p:nvSpPr>
+          <p:cNvPr id="5" name="Text 5"/>
+          <p:cNvSpPr txBox="1"/>
+          <p:nvPr/>
+        </p:nvSpPr>
+        <p:spPr>
+          <a:xfrm>
+            <a:off x="2000250" y="2771775"/>
+            <a:ext cx="11029950" cy="539115"/>
+          </a:xfrm>
+          <a:prstGeom prst="rect">
+            <a:avLst/>
+          </a:prstGeom>
+          <a:noFill/>
+          <a:ln>
+            <a:noFill/>
+          </a:ln>
+        </p:spPr>
+        <p:txBody>
+          <a:bodyPr wrap="none" lIns="0" tIns="0" rIns="0" bIns="0" anchor="t">
+            <a:noAutofit/>
+          </a:bodyPr>
+          <a:lstStyle/>
+          <a:p>
+            <a:pPr marL="0" indent="0">
+              <a:lnSpc>
+                <a:spcPts val="4095"/>
+              </a:lnSpc>
+              <a:spcAft>
+                <a:spcPts val="0"/>
+              </a:spcAft>
+              <a:buNone/>
+            </a:pPr>
+            <a:r>
+              <a:rPr lang="en-US" sz="3150" b="0">
+                <a:solidFill>
+                  <a:srgbClr val="F5F1E9"/>
+                </a:solidFill>
+                <a:latin typeface="Arial"/>
+                <a:ea typeface="Arial"/>
+                <a:cs typeface="Arial"/>
+              </a:rPr>
+              <a:t xml:space="preserve">If we do X, we expect Y to move</a:t>
+            </a:r>
+            <a:endParaRPr lang="en-US" sz="3150"/>
+          </a:p>
+        </p:txBody>
+      </p:sp>
+      <p:sp>
+        <p:nvSpPr>
+          <p:cNvPr id="6" name="Text 6"/>
+          <p:cNvSpPr txBox="1"/>
+          <p:nvPr/>
+        </p:nvSpPr>
+        <p:spPr>
+          <a:xfrm>
+            <a:off x="685800" y="3558540"/>
+            <a:ext cx="904875" cy="476250"/>
+          </a:xfrm>
+          <a:prstGeom prst="rect">
+            <a:avLst/>
+          </a:prstGeom>
+          <a:noFill/>
+          <a:ln>
+            <a:noFill/>
+          </a:ln>
+        </p:spPr>
+        <p:txBody>
+          <a:bodyPr wrap="none" lIns="0" tIns="0" rIns="0" bIns="0" anchor="t">
+            <a:noAutofit/>
+          </a:bodyPr>
+          <a:lstStyle/>
+          <a:p>
+            <a:pPr marL="0" indent="0">
+              <a:lnSpc>
+                <a:spcPts val="2438"/>
+              </a:lnSpc>
+              <a:spcAft>
+                <a:spcPts val="0"/>
+              </a:spcAft>
+              <a:buNone/>
+            </a:pPr>
+            <a:r>
+              <a:rPr lang="en-US" sz="1875" b="0">
+                <a:solidFill>
+                  <a:srgbClr val="EFB45F"/>
+                </a:solidFill>
+                <a:latin typeface="Arial"/>
+                <a:ea typeface="Arial"/>
+                <a:cs typeface="Arial"/>
+              </a:rPr>
+              <a:t xml:space="preserve">02</a:t>
+            </a:r>
+            <a:endParaRPr lang="en-US" sz="1875"/>
+          </a:p>
+        </p:txBody>
+      </p:sp>
+      <p:sp>
+        <p:nvSpPr>
+          <p:cNvPr id="7" name="Text 7"/>
+          <p:cNvSpPr txBox="1"/>
+          <p:nvPr/>
+        </p:nvSpPr>
+        <p:spPr>
+          <a:xfrm>
+            <a:off x="2000250" y="3558540"/>
+            <a:ext cx="11029950" cy="1059180"/>
+          </a:xfrm>
+          <a:prstGeom prst="rect">
+            <a:avLst/>
+          </a:prstGeom>
+          <a:noFill/>
+          <a:ln>
+            <a:noFill/>
+          </a:ln>
+        </p:spPr>
+        <p:txBody>
+          <a:bodyPr wrap="none" lIns="0" tIns="0" rIns="0" bIns="0" anchor="t">
+            <a:noAutofit/>
+          </a:bodyPr>
+          <a:lstStyle/>
+          <a:p>
+            <a:pPr marL="0" indent="0">
+              <a:lnSpc>
+                <a:spcPts val="4095"/>
+              </a:lnSpc>
+              <a:spcAft>
+                <a:spcPts val="0"/>
+              </a:spcAft>
+              <a:buNone/>
+            </a:pPr>
+            <a:r>
+              <a:rPr lang="en-US" sz="3150" b="0">
+                <a:solidFill>
+                  <a:srgbClr val="F5F1E9"/>
+                </a:solidFill>
+                <a:latin typeface="Arial"/>
+                <a:ea typeface="Arial"/>
+                <a:cs typeface="Arial"/>
+              </a:rPr>
+              <a:t xml:space="preserve">Report success, failure, and surprise where the team</a:t>
+            </a:r>
+            <a:endParaRPr lang="en-US" sz="3150"/>
+          </a:p>
+          <a:p>
+            <a:pPr marL="0" indent="0">
+              <a:lnSpc>
+                <a:spcPts val="4095"/>
+              </a:lnSpc>
+              <a:spcAft>
+                <a:spcPts val="0"/>
+              </a:spcAft>
+              <a:buNone/>
+            </a:pPr>
+            <a:r>
+              <a:rPr lang="en-US" sz="3150" b="0">
+                <a:solidFill>
+                  <a:srgbClr val="F5F1E9"/>
+                </a:solidFill>
+                <a:latin typeface="Arial"/>
+                <a:ea typeface="Arial"/>
+                <a:cs typeface="Arial"/>
+              </a:rPr>
+              <a:t xml:space="preserve">looks</a:t>
+            </a:r>
+            <a:endParaRPr lang="en-US" sz="3150"/>
+          </a:p>
+        </p:txBody>
+      </p:sp>
+      <p:sp>
+        <p:nvSpPr>
+          <p:cNvPr id="8" name="Text 8"/>
+          <p:cNvSpPr txBox="1"/>
+          <p:nvPr/>
+        </p:nvSpPr>
+        <p:spPr>
+          <a:xfrm>
+            <a:off x="457200" y="8286750"/>
+            <a:ext cx="12477750" cy="190500"/>
+          </a:xfrm>
+          <a:prstGeom prst="rect">
+            <a:avLst/>
+          </a:prstGeom>
+          <a:noFill/>
+          <a:ln>
+            <a:noFill/>
+          </a:ln>
+        </p:spPr>
+        <p:txBody>
+          <a:bodyPr wrap="none" lIns="0" tIns="0" rIns="0" bIns="0" anchor="t">
+            <a:noAutofit/>
+          </a:bodyPr>
+          <a:lstStyle/>
+          <a:p>
+            <a:pPr marL="0" indent="0">
+              <a:lnSpc>
+                <a:spcPts val="1268"/>
+              </a:lnSpc>
+              <a:spcAft>
+                <a:spcPts val="0"/>
+              </a:spcAft>
+              <a:buNone/>
+            </a:pPr>
+            <a:r>
+              <a:rPr lang="en-US" sz="975" b="0">
+                <a:solidFill>
+                  <a:srgbClr val="BEC9C6"/>
+                </a:solidFill>
+                <a:latin typeface="Arial"/>
+                <a:ea typeface="Arial"/>
+                <a:cs typeface="Arial"/>
+              </a:rPr>
+              <a:t xml:space="preserve">The Future of Product Engineering: Break the Mirror on Purpose</a:t>
+            </a:r>
+            <a:endParaRPr lang="en-US" sz="975"/>
+          </a:p>
+        </p:txBody>
+      </p:sp>
+      <p:sp>
+        <p:nvSpPr>
+          <p:cNvPr id="9" name="Text 9"/>
+          <p:cNvSpPr txBox="1"/>
+          <p:nvPr/>
+        </p:nvSpPr>
+        <p:spPr>
+          <a:xfrm>
+            <a:off x="13049250" y="8286750"/>
+            <a:ext cx="238125" cy="190500"/>
+          </a:xfrm>
+          <a:prstGeom prst="rect">
+            <a:avLst/>
+          </a:prstGeom>
+          <a:noFill/>
+          <a:ln>
+            <a:noFill/>
+          </a:ln>
+        </p:spPr>
+        <p:txBody>
+          <a:bodyPr wrap="none" lIns="0" tIns="0" rIns="0" bIns="0" anchor="t">
+            <a:noAutofit/>
+          </a:bodyPr>
+          <a:lstStyle/>
+          <a:p>
+            <a:pPr marL="0" indent="0">
+              <a:lnSpc>
+                <a:spcPts val="1268"/>
+              </a:lnSpc>
+              <a:spcAft>
+                <a:spcPts val="0"/>
+              </a:spcAft>
+              <a:buNone/>
+            </a:pPr>
+            <a:r>
+              <a:rPr lang="en-US" sz="975" b="0">
+                <a:solidFill>
+                  <a:srgbClr val="BEC9C6"/>
+                </a:solidFill>
+                <a:latin typeface="Arial"/>
+                <a:ea typeface="Arial"/>
+                <a:cs typeface="Arial"/>
+              </a:rPr>
+              <a:t xml:space="preserve">16</a:t>
+            </a:r>
+            <a:endParaRPr lang="en-US" sz="975"/>
+          </a:p>
+        </p:txBody>
+      </p:sp>
+    </p:spTree>
+  </p:cSld>
+  <p:clrMapOvr>
+    <a:masterClrMapping/>
+  </p:clrMapOvr>
+</p:sld>
+</file>
+
+<file path=ppt/slides/slide17.xml><?xml version="1.0" encoding="utf-8"?>
+<p:sld xmlns:a="http://schemas.openxmlformats.org/drawingml/2006/main" xmlns:r="http://schemas.openxmlformats.org/officeDocument/2006/relationships" xmlns:p="http://schemas.openxmlformats.org/presentationml/2006/main">
+  <p:cSld name="Slide 17">
+    <p:bg>
+      <p:bgPr>
+        <a:solidFill>
+          <a:srgbClr val="161D26"/>
+        </a:solidFill>
+        <a:effectLst/>
+      </p:bgPr>
+    </p:bg>
+    <p:spTree>
+      <p:nvGrpSpPr>
+        <p:cNvPr id="1" name=""/>
+        <p:cNvGrpSpPr/>
+        <p:nvPr/>
+      </p:nvGrpSpPr>
+      <p:grpSpPr>
+        <a:xfrm>
+          <a:off x="0" y="0"/>
+          <a:ext cx="0" cy="0"/>
+          <a:chOff x="0" y="0"/>
+          <a:chExt cx="0" cy="0"/>
+        </a:xfrm>
+      </p:grpSpPr>
+      <p:sp>
+        <p:nvSpPr>
+          <p:cNvPr id="2" name="Text 2"/>
+          <p:cNvSpPr txBox="1"/>
+          <p:nvPr/>
+        </p:nvSpPr>
+        <p:spPr>
+          <a:xfrm>
+            <a:off x="685800" y="381000"/>
+            <a:ext cx="12344400" cy="457200"/>
+          </a:xfrm>
+          <a:prstGeom prst="rect">
+            <a:avLst/>
+          </a:prstGeom>
+          <a:noFill/>
+          <a:ln>
+            <a:noFill/>
+          </a:ln>
+        </p:spPr>
+        <p:txBody>
+          <a:bodyPr wrap="none" lIns="0" tIns="0" rIns="0" bIns="0" anchor="t">
+            <a:noAutofit/>
+          </a:bodyPr>
+          <a:lstStyle/>
+          <a:p>
+            <a:pPr marL="0" indent="0">
+              <a:lnSpc>
+                <a:spcPts val="1755"/>
+              </a:lnSpc>
+              <a:spcAft>
+                <a:spcPts val="0"/>
+              </a:spcAft>
+              <a:buNone/>
+            </a:pPr>
+            <a:r>
+              <a:rPr lang="en-US" sz="1350" b="1">
+                <a:solidFill>
+                  <a:srgbClr val="EFB45F"/>
+                </a:solidFill>
+                <a:latin typeface="Arial"/>
+                <a:ea typeface="Arial"/>
+                <a:cs typeface="Arial"/>
+              </a:rPr>
+              <a:t xml:space="preserve">17 / 17    SOURCE SLIDE 17</a:t>
+            </a:r>
+            <a:endParaRPr lang="en-US" sz="1350"/>
+          </a:p>
+        </p:txBody>
+      </p:sp>
+      <p:sp>
+        <p:nvSpPr>
+          <p:cNvPr id="3" name="Text 3"/>
+          <p:cNvSpPr txBox="1"/>
+          <p:nvPr/>
+        </p:nvSpPr>
+        <p:spPr>
+          <a:xfrm>
+            <a:off x="685800" y="1057275"/>
+            <a:ext cx="12344400" cy="1381125"/>
+          </a:xfrm>
+          <a:prstGeom prst="rect">
+            <a:avLst/>
+          </a:prstGeom>
+          <a:noFill/>
+          <a:ln>
+            <a:noFill/>
+          </a:ln>
+        </p:spPr>
+        <p:txBody>
+          <a:bodyPr wrap="none" lIns="0" tIns="0" rIns="0" bIns="0" anchor="t">
+            <a:noAutofit/>
+          </a:bodyPr>
+          <a:lstStyle/>
+          <a:p>
+            <a:pPr marL="0" indent="0">
+              <a:lnSpc>
+                <a:spcPts val="4680"/>
+              </a:lnSpc>
+              <a:spcAft>
+                <a:spcPts val="0"/>
+              </a:spcAft>
+              <a:buNone/>
+            </a:pPr>
+            <a:r>
+              <a:rPr lang="en-US" sz="3900" b="1">
+                <a:solidFill>
+                  <a:srgbClr val="F5F1E9"/>
+                </a:solidFill>
+                <a:latin typeface="Arial"/>
+                <a:ea typeface="Arial"/>
+                <a:cs typeface="Arial"/>
+              </a:rPr>
+              <a:t xml:space="preserve">Break the mirror on purpose</a:t>
+            </a:r>
+            <a:endParaRPr lang="en-US" sz="3900"/>
+          </a:p>
+        </p:txBody>
+      </p:sp>
+      <p:sp>
+        <p:nvSpPr>
+          <p:cNvPr id="4" name="Text 4"/>
+          <p:cNvSpPr txBox="1"/>
+          <p:nvPr/>
+        </p:nvSpPr>
+        <p:spPr>
+          <a:xfrm>
+            <a:off x="685800" y="2771775"/>
+            <a:ext cx="904875" cy="476250"/>
+          </a:xfrm>
+          <a:prstGeom prst="rect">
+            <a:avLst/>
+          </a:prstGeom>
+          <a:noFill/>
+          <a:ln>
+            <a:noFill/>
+          </a:ln>
+        </p:spPr>
+        <p:txBody>
+          <a:bodyPr wrap="none" lIns="0" tIns="0" rIns="0" bIns="0" anchor="t">
+            <a:noAutofit/>
+          </a:bodyPr>
+          <a:lstStyle/>
+          <a:p>
+            <a:pPr marL="0" indent="0">
+              <a:lnSpc>
+                <a:spcPts val="2438"/>
+              </a:lnSpc>
+              <a:spcAft>
+                <a:spcPts val="0"/>
+              </a:spcAft>
+              <a:buNone/>
+            </a:pPr>
+            <a:r>
+              <a:rPr lang="en-US" sz="1875" b="0">
+                <a:solidFill>
+                  <a:srgbClr val="EFB45F"/>
+                </a:solidFill>
+                <a:latin typeface="Arial"/>
+                <a:ea typeface="Arial"/>
+                <a:cs typeface="Arial"/>
+              </a:rPr>
+              <a:t xml:space="preserve">01</a:t>
+            </a:r>
+            <a:endParaRPr lang="en-US" sz="1875"/>
+          </a:p>
+        </p:txBody>
+      </p:sp>
+      <p:sp>
+        <p:nvSpPr>
+          <p:cNvPr id="5" name="Text 5"/>
+          <p:cNvSpPr txBox="1"/>
+          <p:nvPr/>
+        </p:nvSpPr>
+        <p:spPr>
+          <a:xfrm>
+            <a:off x="2000250" y="2771775"/>
+            <a:ext cx="11029950" cy="539115"/>
+          </a:xfrm>
+          <a:prstGeom prst="rect">
+            <a:avLst/>
+          </a:prstGeom>
+          <a:noFill/>
+          <a:ln>
+            <a:noFill/>
+          </a:ln>
+        </p:spPr>
+        <p:txBody>
+          <a:bodyPr wrap="none" lIns="0" tIns="0" rIns="0" bIns="0" anchor="t">
+            <a:noAutofit/>
+          </a:bodyPr>
+          <a:lstStyle/>
+          <a:p>
+            <a:pPr marL="0" indent="0">
+              <a:lnSpc>
+                <a:spcPts val="4095"/>
+              </a:lnSpc>
+              <a:spcAft>
+                <a:spcPts val="0"/>
+              </a:spcAft>
+              <a:buNone/>
+            </a:pPr>
+            <a:r>
+              <a:rPr lang="en-US" sz="3150" b="0">
+                <a:solidFill>
+                  <a:srgbClr val="F5F1E9"/>
+                </a:solidFill>
+                <a:latin typeface="Arial"/>
+                <a:ea typeface="Arial"/>
+                <a:cs typeface="Arial"/>
+              </a:rPr>
+              <a:t xml:space="preserve">Reprice the handoffs. Draw the interfaces.</a:t>
+            </a:r>
+            <a:endParaRPr lang="en-US" sz="3150"/>
+          </a:p>
+        </p:txBody>
+      </p:sp>
+      <p:sp>
+        <p:nvSpPr>
+          <p:cNvPr id="6" name="Text 6"/>
+          <p:cNvSpPr txBox="1"/>
+          <p:nvPr/>
+        </p:nvSpPr>
+        <p:spPr>
+          <a:xfrm>
+            <a:off x="685800" y="3558540"/>
+            <a:ext cx="904875" cy="476250"/>
+          </a:xfrm>
+          <a:prstGeom prst="rect">
+            <a:avLst/>
+          </a:prstGeom>
+          <a:noFill/>
+          <a:ln>
+            <a:noFill/>
+          </a:ln>
+        </p:spPr>
+        <p:txBody>
+          <a:bodyPr wrap="none" lIns="0" tIns="0" rIns="0" bIns="0" anchor="t">
+            <a:noAutofit/>
+          </a:bodyPr>
+          <a:lstStyle/>
+          <a:p>
+            <a:pPr marL="0" indent="0">
+              <a:lnSpc>
+                <a:spcPts val="2438"/>
+              </a:lnSpc>
+              <a:spcAft>
+                <a:spcPts val="0"/>
+              </a:spcAft>
+              <a:buNone/>
+            </a:pPr>
+            <a:r>
+              <a:rPr lang="en-US" sz="1875" b="0">
+                <a:solidFill>
+                  <a:srgbClr val="EFB45F"/>
+                </a:solidFill>
+                <a:latin typeface="Arial"/>
+                <a:ea typeface="Arial"/>
+                <a:cs typeface="Arial"/>
+              </a:rPr>
+              <a:t xml:space="preserve">02</a:t>
+            </a:r>
+            <a:endParaRPr lang="en-US" sz="1875"/>
+          </a:p>
+        </p:txBody>
+      </p:sp>
+      <p:sp>
+        <p:nvSpPr>
+          <p:cNvPr id="7" name="Text 7"/>
+          <p:cNvSpPr txBox="1"/>
+          <p:nvPr/>
+        </p:nvSpPr>
+        <p:spPr>
+          <a:xfrm>
+            <a:off x="2000250" y="3558540"/>
+            <a:ext cx="11029950" cy="539115"/>
+          </a:xfrm>
+          <a:prstGeom prst="rect">
+            <a:avLst/>
+          </a:prstGeom>
+          <a:noFill/>
+          <a:ln>
+            <a:noFill/>
+          </a:ln>
+        </p:spPr>
+        <p:txBody>
+          <a:bodyPr wrap="none" lIns="0" tIns="0" rIns="0" bIns="0" anchor="t">
+            <a:noAutofit/>
+          </a:bodyPr>
+          <a:lstStyle/>
+          <a:p>
+            <a:pPr marL="0" indent="0">
+              <a:lnSpc>
+                <a:spcPts val="4095"/>
+              </a:lnSpc>
+              <a:spcAft>
+                <a:spcPts val="0"/>
+              </a:spcAft>
+              <a:buNone/>
+            </a:pPr>
+            <a:r>
+              <a:rPr lang="en-US" sz="3150" b="0">
+                <a:solidFill>
+                  <a:srgbClr val="F5F1E9"/>
+                </a:solidFill>
+                <a:latin typeface="Arial"/>
+                <a:ea typeface="Arial"/>
+                <a:cs typeface="Arial"/>
+              </a:rPr>
+              <a:t xml:space="preserve">Automate the right things. Keep the taste.</a:t>
+            </a:r>
+            <a:endParaRPr lang="en-US" sz="3150"/>
+          </a:p>
+        </p:txBody>
+      </p:sp>
+      <p:sp>
+        <p:nvSpPr>
+          <p:cNvPr id="8" name="Text 8"/>
+          <p:cNvSpPr txBox="1"/>
+          <p:nvPr/>
+        </p:nvSpPr>
+        <p:spPr>
+          <a:xfrm>
+            <a:off x="457200" y="8286750"/>
+            <a:ext cx="12477750" cy="190500"/>
+          </a:xfrm>
+          <a:prstGeom prst="rect">
+            <a:avLst/>
+          </a:prstGeom>
+          <a:noFill/>
+          <a:ln>
+            <a:noFill/>
+          </a:ln>
+        </p:spPr>
+        <p:txBody>
+          <a:bodyPr wrap="none" lIns="0" tIns="0" rIns="0" bIns="0" anchor="t">
+            <a:noAutofit/>
+          </a:bodyPr>
+          <a:lstStyle/>
+          <a:p>
+            <a:pPr marL="0" indent="0">
+              <a:lnSpc>
+                <a:spcPts val="1268"/>
+              </a:lnSpc>
+              <a:spcAft>
+                <a:spcPts val="0"/>
+              </a:spcAft>
+              <a:buNone/>
+            </a:pPr>
+            <a:r>
+              <a:rPr lang="en-US" sz="975" b="0">
+                <a:solidFill>
+                  <a:srgbClr val="BEC9C6"/>
+                </a:solidFill>
+                <a:latin typeface="Arial"/>
+                <a:ea typeface="Arial"/>
+                <a:cs typeface="Arial"/>
+              </a:rPr>
+              <a:t xml:space="preserve">The Future of Product Engineering: Break the Mirror on Purpose</a:t>
+            </a:r>
+            <a:endParaRPr lang="en-US" sz="975"/>
+          </a:p>
+        </p:txBody>
+      </p:sp>
+      <p:sp>
+        <p:nvSpPr>
+          <p:cNvPr id="9" name="Text 9"/>
+          <p:cNvSpPr txBox="1"/>
+          <p:nvPr/>
+        </p:nvSpPr>
+        <p:spPr>
+          <a:xfrm>
+            <a:off x="13049250" y="8286750"/>
+            <a:ext cx="238125" cy="190500"/>
+          </a:xfrm>
+          <a:prstGeom prst="rect">
+            <a:avLst/>
+          </a:prstGeom>
+          <a:noFill/>
+          <a:ln>
+            <a:noFill/>
+          </a:ln>
+        </p:spPr>
+        <p:txBody>
+          <a:bodyPr wrap="none" lIns="0" tIns="0" rIns="0" bIns="0" anchor="t">
+            <a:noAutofit/>
+          </a:bodyPr>
+          <a:lstStyle/>
+          <a:p>
+            <a:pPr marL="0" indent="0">
+              <a:lnSpc>
+                <a:spcPts val="1268"/>
+              </a:lnSpc>
+              <a:spcAft>
+                <a:spcPts val="0"/>
+              </a:spcAft>
+              <a:buNone/>
+            </a:pPr>
+            <a:r>
+              <a:rPr lang="en-US" sz="975" b="0">
+                <a:solidFill>
+                  <a:srgbClr val="BEC9C6"/>
+                </a:solidFill>
+                <a:latin typeface="Arial"/>
+                <a:ea typeface="Arial"/>
+                <a:cs typeface="Arial"/>
+              </a:rPr>
+              <a:t xml:space="preserve">17</a:t>
             </a:r>
             <a:endParaRPr lang="en-US" sz="975"/>
           </a:p>
@@ -9684,7 +11832,7 @@
                 <a:ea typeface="Arial"/>
                 <a:cs typeface="Arial"/>
               </a:rPr>
-              <a:t xml:space="preserve">02 / 15    SOURCE SLIDE 2</a:t>
+              <a:t xml:space="preserve">02 / 17    SOURCE SLIDE 2</a:t>
             </a:r>
             <a:endParaRPr lang="en-US" sz="1350"/>
           </a:p>
@@ -9929,7 +12077,7 @@
                 <a:ea typeface="Arial"/>
                 <a:cs typeface="Arial"/>
               </a:rPr>
-              <a:t xml:space="preserve">Firm/industry descriptive studies: 70% strong, 22%</a:t>
+              <a:t xml:space="preserve">Mostly supported, with a documented minority that</a:t>
             </a:r>
             <a:endParaRPr lang="en-US" sz="3150"/>
           </a:p>
@@ -9952,7 +12100,7 @@
                 <a:ea typeface="Arial"/>
                 <a:cs typeface="Arial"/>
               </a:rPr>
-              <a:t xml:space="preserve">partial, 8% no support</a:t>
+              <a:t xml:space="preserve">was not</a:t>
             </a:r>
             <a:endParaRPr lang="en-US" sz="3150"/>
           </a:p>
@@ -10132,7 +12280,7 @@
                 <a:ea typeface="Arial"/>
                 <a:cs typeface="Arial"/>
               </a:rPr>
-              <a:t xml:space="preserve">03 / 15    SOURCE SLIDE 3</a:t>
+              <a:t xml:space="preserve">03 / 17    SOURCE SLIDE 3</a:t>
             </a:r>
             <a:endParaRPr lang="en-US" sz="1350"/>
           </a:p>
@@ -10557,7 +12705,7 @@
                 <a:ea typeface="Arial"/>
                 <a:cs typeface="Arial"/>
               </a:rPr>
-              <a:t xml:space="preserve">04 / 15    SOURCE SLIDE 4</a:t>
+              <a:t xml:space="preserve">04 / 17    SOURCE SLIDE 4</a:t>
             </a:r>
             <a:endParaRPr lang="en-US" sz="1350"/>
           </a:p>
@@ -10982,7 +13130,7 @@
                 <a:ea typeface="Arial"/>
                 <a:cs typeface="Arial"/>
               </a:rPr>
-              <a:t xml:space="preserve">05 / 15    SOURCE SLIDE 5</a:t>
+              <a:t xml:space="preserve">05 / 17    SOURCE SLIDE 5</a:t>
             </a:r>
             <a:endParaRPr lang="en-US" sz="1350"/>
           </a:p>
@@ -11266,7 +13414,7 @@
                 <a:ea typeface="Arial"/>
                 <a:cs typeface="Arial"/>
               </a:rPr>
-              <a:t xml:space="preserve">06 / 15    SOURCE SLIDE 6</a:t>
+              <a:t xml:space="preserve">06 / 17    SOURCE SLIDE 6</a:t>
             </a:r>
             <a:endParaRPr lang="en-US" sz="1350"/>
           </a:p>
@@ -11691,7 +13839,7 @@
                 <a:ea typeface="Arial"/>
                 <a:cs typeface="Arial"/>
               </a:rPr>
-              <a:t xml:space="preserve">07 / 15    SOURCE SLIDE 7</a:t>
+              <a:t xml:space="preserve">07 / 17    SOURCE SLIDE 7</a:t>
             </a:r>
             <a:endParaRPr lang="en-US" sz="1350"/>
           </a:p>
@@ -12116,7 +14264,7 @@
                 <a:ea typeface="Arial"/>
                 <a:cs typeface="Arial"/>
               </a:rPr>
-              <a:t xml:space="preserve">08 / 15    SOURCE SLIDE 8</a:t>
+              <a:t xml:space="preserve">08 / 17    SOURCE SLIDE 8</a:t>
             </a:r>
             <a:endParaRPr lang="en-US" sz="1350"/>
           </a:p>
@@ -12541,7 +14689,7 @@
                 <a:ea typeface="Arial"/>
                 <a:cs typeface="Arial"/>
               </a:rPr>
-              <a:t xml:space="preserve">09 / 15    SOURCE SLIDE 9</a:t>
+              <a:t xml:space="preserve">09 / 17    SOURCE SLIDE 9</a:t>
             </a:r>
             <a:endParaRPr lang="en-US" sz="1350"/>
           </a:p>

--- a/artifacts/speaking-portfolio-expanded/decks/product-engineering-40min-screen.pptx
+++ b/artifacts/speaking-portfolio-expanded/decks/product-engineering-40min-screen.pptx
@@ -2376,6 +2376,52 @@
                 <a:ea typeface="Arial"/>
                 <a:cs typeface="Arial"/>
               </a:rPr>
+              <a:t xml:space="preserve">![Prediction: tokens stop being a build cost and become a running cost. A shipped product with no new features still burns tokens to stay current and to defend itself, and somebody owns that meter.](../../reveal-talks/assets/product-engineering/fuel.svg)</a:t>
+            </a:r>
+            <a:endParaRPr lang="en-US" sz="1200"/>
+          </a:p>
+          <a:p>
+            <a:pPr marL="0" indent="0">
+              <a:lnSpc>
+                <a:spcPts val="1560"/>
+              </a:lnSpc>
+              <a:spcAft>
+                <a:spcPts val="0"/>
+              </a:spcAft>
+              <a:buNone/>
+            </a:pPr>
+            <a:r>
+              <a:rPr lang="en-US" sz="1200" b="0">
+                <a:solidFill>
+                  <a:srgbClr val="202b33"/>
+                </a:solidFill>
+                <a:latin typeface="Arial"/>
+                <a:ea typeface="Arial"/>
+                <a:cs typeface="Arial"/>
+              </a:rPr>
+              <a:t xml:space="preserve"/>
+            </a:r>
+            <a:endParaRPr lang="en-US" sz="1200"/>
+          </a:p>
+          <a:p>
+            <a:pPr marL="0" indent="0">
+              <a:lnSpc>
+                <a:spcPts val="1560"/>
+              </a:lnSpc>
+              <a:spcAft>
+                <a:spcPts val="0"/>
+              </a:spcAft>
+              <a:buNone/>
+            </a:pPr>
+            <a:r>
+              <a:rPr lang="en-US" sz="1200" b="0">
+                <a:solidFill>
+                  <a:srgbClr val="202b33"/>
+                </a:solidFill>
+                <a:latin typeface="Arial"/>
+                <a:ea typeface="Arial"/>
+                <a:cs typeface="Arial"/>
+              </a:rPr>
               <a:t xml:space="preserve">&gt; Tokens stop being a build cost and become a running cost</a:t>
             </a:r>
             <a:endParaRPr lang="en-US" sz="1200"/>
@@ -2858,6 +2904,52 @@
                 <a:cs typeface="Arial"/>
               </a:rPr>
               <a:t xml:space="preserve">32:30 to 35:30 · land</a:t>
+            </a:r>
+            <a:endParaRPr lang="en-US" sz="1200"/>
+          </a:p>
+          <a:p>
+            <a:pPr marL="0" indent="0">
+              <a:lnSpc>
+                <a:spcPts val="1560"/>
+              </a:lnSpc>
+              <a:spcAft>
+                <a:spcPts val="0"/>
+              </a:spcAft>
+              <a:buNone/>
+            </a:pPr>
+            <a:r>
+              <a:rPr lang="en-US" sz="1200" b="0">
+                <a:solidFill>
+                  <a:srgbClr val="202b33"/>
+                </a:solidFill>
+                <a:latin typeface="Arial"/>
+                <a:ea typeface="Arial"/>
+                <a:cs typeface="Arial"/>
+              </a:rPr>
+              <a:t xml:space="preserve"/>
+            </a:r>
+            <a:endParaRPr lang="en-US" sz="1200"/>
+          </a:p>
+          <a:p>
+            <a:pPr marL="0" indent="0">
+              <a:lnSpc>
+                <a:spcPts val="1560"/>
+              </a:lnSpc>
+              <a:spcAft>
+                <a:spcPts val="0"/>
+              </a:spcAft>
+              <a:buNone/>
+            </a:pPr>
+            <a:r>
+              <a:rPr lang="en-US" sz="1200" b="0">
+                <a:solidFill>
+                  <a:srgbClr val="202b33"/>
+                </a:solidFill>
+                <a:latin typeface="Arial"/>
+                <a:ea typeface="Arial"/>
+                <a:cs typeface="Arial"/>
+              </a:rPr>
+              <a:t xml:space="preserve">![Prediction: a grid of chosen apps gives way to one generated surface, adapting per person, with a revived terminal beside it. Who owns that channel is still open, and non-frontier builders can rethink any app as AI-native.](../../reveal-talks/assets/product-engineering/channel.svg)</a:t>
             </a:r>
             <a:endParaRPr lang="en-US" sz="1200"/>
           </a:p>
@@ -9878,14 +9970,69 @@
       </p:sp>
       <p:sp>
         <p:nvSpPr>
-          <p:cNvPr id="4" name="Text 4"/>
+          <p:cNvPr id="4" name="Image background"/>
+          <p:cNvSpPr/>
+          <p:nvPr/>
+        </p:nvSpPr>
+        <p:spPr>
+          <a:xfrm>
+            <a:off x="944880" y="2647950"/>
+            <a:ext cx="11826240" cy="4619625"/>
+          </a:xfrm>
+          <a:prstGeom prst="rect">
+            <a:avLst/>
+          </a:prstGeom>
+          <a:solidFill>
+            <a:srgbClr val="161D26"/>
+          </a:solidFill>
+          <a:ln>
+            <a:noFill/>
+          </a:ln>
+        </p:spPr>
+      </p:sp>
+      <p:pic>
+        <p:nvPicPr>
+          <p:cNvPr id="5" name="da77ca1e4e5418bd2fa4cf46388998c2f435dc1571b24610451ddae64742a217" descr="Prediction: tokens stop being a build cost and become a running cost. A shipped product with no new features still burns tokens to stay current and to defend itself, and somebody owns that meter."/>
+          <p:cNvPicPr>
+            <a:picLocks noChangeAspect="1"/>
+          </p:cNvPicPr>
+          <p:nvPr/>
+        </p:nvPicPr>
+        <p:blipFill>
+          <a:blip r:embed="rIdImage1">
+            <a:extLst>
+              <a:ext uri="{96DAC541-7B7A-43D3-8B79-37D633B846F1}">
+                <asvg:svgBlip xmlns:asvg="http://schemas.microsoft.com/office/drawing/2016/SVG/main" r:embed="rIdSvg1"/>
+              </a:ext>
+            </a:extLst>
+          </a:blip>
+          <a:stretch>
+            <a:fillRect/>
+          </a:stretch>
+        </p:blipFill>
+        <p:spPr>
+          <a:xfrm>
+            <a:off x="944880" y="2647950"/>
+            <a:ext cx="11826240" cy="4619625"/>
+          </a:xfrm>
+          <a:prstGeom prst="rect">
+            <a:avLst/>
+          </a:prstGeom>
+          <a:ln>
+            <a:noFill/>
+          </a:ln>
+        </p:spPr>
+      </p:pic>
+      <p:sp>
+        <p:nvSpPr>
+          <p:cNvPr id="6" name="Text 6"/>
           <p:cNvSpPr txBox="1"/>
           <p:nvPr/>
         </p:nvSpPr>
         <p:spPr>
           <a:xfrm>
-            <a:off x="685800" y="2771775"/>
-            <a:ext cx="904875" cy="476250"/>
+            <a:off x="457200" y="8286750"/>
+            <a:ext cx="12477750" cy="190500"/>
           </a:xfrm>
           <a:prstGeom prst="rect">
             <a:avLst/>
@@ -9903,394 +10050,31 @@
           <a:p>
             <a:pPr marL="0" indent="0">
               <a:lnSpc>
-                <a:spcPts val="2438"/>
-              </a:lnSpc>
-              <a:spcAft>
-                <a:spcPts val="0"/>
-              </a:spcAft>
-              <a:buNone/>
-            </a:pPr>
-            <a:r>
-              <a:rPr lang="en-US" sz="1875" b="0">
-                <a:solidFill>
-                  <a:srgbClr val="EFB45F"/>
-                </a:solidFill>
-                <a:latin typeface="Arial"/>
-                <a:ea typeface="Arial"/>
-                <a:cs typeface="Arial"/>
-              </a:rPr>
-              <a:t xml:space="preserve">01</a:t>
-            </a:r>
-            <a:endParaRPr lang="en-US" sz="1875"/>
-          </a:p>
-        </p:txBody>
-      </p:sp>
-      <p:sp>
-        <p:nvSpPr>
-          <p:cNvPr id="5" name="Text 5"/>
-          <p:cNvSpPr txBox="1"/>
-          <p:nvPr/>
-        </p:nvSpPr>
-        <p:spPr>
-          <a:xfrm>
-            <a:off x="2000250" y="2771775"/>
-            <a:ext cx="11029950" cy="1059180"/>
-          </a:xfrm>
-          <a:prstGeom prst="rect">
-            <a:avLst/>
-          </a:prstGeom>
-          <a:noFill/>
-          <a:ln>
-            <a:noFill/>
-          </a:ln>
-        </p:spPr>
-        <p:txBody>
-          <a:bodyPr wrap="none" lIns="0" tIns="0" rIns="0" bIns="0" anchor="t">
-            <a:noAutofit/>
-          </a:bodyPr>
-          <a:lstStyle/>
-          <a:p>
-            <a:pPr marL="0" indent="0">
-              <a:lnSpc>
-                <a:spcPts val="4095"/>
-              </a:lnSpc>
-              <a:spcAft>
-                <a:spcPts val="0"/>
-              </a:spcAft>
-              <a:buNone/>
-            </a:pPr>
-            <a:r>
-              <a:rPr lang="en-US" sz="3150" b="0">
-                <a:solidFill>
-                  <a:srgbClr val="F5F1E9"/>
-                </a:solidFill>
-                <a:latin typeface="Arial"/>
-                <a:ea typeface="Arial"/>
-                <a:cs typeface="Arial"/>
-              </a:rPr>
-              <a:t xml:space="preserve">Tokens stop being a build cost and become a running</a:t>
-            </a:r>
-            <a:endParaRPr lang="en-US" sz="3150"/>
-          </a:p>
-          <a:p>
-            <a:pPr marL="0" indent="0">
-              <a:lnSpc>
-                <a:spcPts val="4095"/>
-              </a:lnSpc>
-              <a:spcAft>
-                <a:spcPts val="0"/>
-              </a:spcAft>
-              <a:buNone/>
-            </a:pPr>
-            <a:r>
-              <a:rPr lang="en-US" sz="3150" b="0">
-                <a:solidFill>
-                  <a:srgbClr val="F5F1E9"/>
-                </a:solidFill>
-                <a:latin typeface="Arial"/>
-                <a:ea typeface="Arial"/>
-                <a:cs typeface="Arial"/>
-              </a:rPr>
-              <a:t xml:space="preserve">cost</a:t>
-            </a:r>
-            <a:endParaRPr lang="en-US" sz="3150"/>
-          </a:p>
-        </p:txBody>
-      </p:sp>
-      <p:sp>
-        <p:nvSpPr>
-          <p:cNvPr id="6" name="Text 6"/>
-          <p:cNvSpPr txBox="1"/>
-          <p:nvPr/>
-        </p:nvSpPr>
-        <p:spPr>
-          <a:xfrm>
-            <a:off x="685800" y="4078605"/>
-            <a:ext cx="904875" cy="476250"/>
-          </a:xfrm>
-          <a:prstGeom prst="rect">
-            <a:avLst/>
-          </a:prstGeom>
-          <a:noFill/>
-          <a:ln>
-            <a:noFill/>
-          </a:ln>
-        </p:spPr>
-        <p:txBody>
-          <a:bodyPr wrap="none" lIns="0" tIns="0" rIns="0" bIns="0" anchor="t">
-            <a:noAutofit/>
-          </a:bodyPr>
-          <a:lstStyle/>
-          <a:p>
-            <a:pPr marL="0" indent="0">
-              <a:lnSpc>
-                <a:spcPts val="2438"/>
-              </a:lnSpc>
-              <a:spcAft>
-                <a:spcPts val="0"/>
-              </a:spcAft>
-              <a:buNone/>
-            </a:pPr>
-            <a:r>
-              <a:rPr lang="en-US" sz="1875" b="0">
-                <a:solidFill>
-                  <a:srgbClr val="EFB45F"/>
-                </a:solidFill>
-                <a:latin typeface="Arial"/>
-                <a:ea typeface="Arial"/>
-                <a:cs typeface="Arial"/>
-              </a:rPr>
-              <a:t xml:space="preserve">02</a:t>
-            </a:r>
-            <a:endParaRPr lang="en-US" sz="1875"/>
+                <a:spcPts val="1268"/>
+              </a:lnSpc>
+              <a:spcAft>
+                <a:spcPts val="0"/>
+              </a:spcAft>
+              <a:buNone/>
+            </a:pPr>
+            <a:r>
+              <a:rPr lang="en-US" sz="975" b="0">
+                <a:solidFill>
+                  <a:srgbClr val="BEC9C6"/>
+                </a:solidFill>
+                <a:latin typeface="Arial"/>
+                <a:ea typeface="Arial"/>
+                <a:cs typeface="Arial"/>
+              </a:rPr>
+              <a:t xml:space="preserve">The Future of Product Engineering: Break the Mirror on Purpose</a:t>
+            </a:r>
+            <a:endParaRPr lang="en-US" sz="975"/>
           </a:p>
         </p:txBody>
       </p:sp>
       <p:sp>
         <p:nvSpPr>
           <p:cNvPr id="7" name="Text 7"/>
-          <p:cNvSpPr txBox="1"/>
-          <p:nvPr/>
-        </p:nvSpPr>
-        <p:spPr>
-          <a:xfrm>
-            <a:off x="2000250" y="4078605"/>
-            <a:ext cx="11029950" cy="1059180"/>
-          </a:xfrm>
-          <a:prstGeom prst="rect">
-            <a:avLst/>
-          </a:prstGeom>
-          <a:noFill/>
-          <a:ln>
-            <a:noFill/>
-          </a:ln>
-        </p:spPr>
-        <p:txBody>
-          <a:bodyPr wrap="none" lIns="0" tIns="0" rIns="0" bIns="0" anchor="t">
-            <a:noAutofit/>
-          </a:bodyPr>
-          <a:lstStyle/>
-          <a:p>
-            <a:pPr marL="0" indent="0">
-              <a:lnSpc>
-                <a:spcPts val="4095"/>
-              </a:lnSpc>
-              <a:spcAft>
-                <a:spcPts val="0"/>
-              </a:spcAft>
-              <a:buNone/>
-            </a:pPr>
-            <a:r>
-              <a:rPr lang="en-US" sz="3150" b="0">
-                <a:solidFill>
-                  <a:srgbClr val="F5F1E9"/>
-                </a:solidFill>
-                <a:latin typeface="Arial"/>
-                <a:ea typeface="Arial"/>
-                <a:cs typeface="Arial"/>
-              </a:rPr>
-              <a:t xml:space="preserve">Sentry bots hunting your own vulnerabilities, 24/7,</a:t>
-            </a:r>
-            <a:endParaRPr lang="en-US" sz="3150"/>
-          </a:p>
-          <a:p>
-            <a:pPr marL="0" indent="0">
-              <a:lnSpc>
-                <a:spcPts val="4095"/>
-              </a:lnSpc>
-              <a:spcAft>
-                <a:spcPts val="0"/>
-              </a:spcAft>
-              <a:buNone/>
-            </a:pPr>
-            <a:r>
-              <a:rPr lang="en-US" sz="3150" b="0">
-                <a:solidFill>
-                  <a:srgbClr val="F5F1E9"/>
-                </a:solidFill>
-                <a:latin typeface="Arial"/>
-                <a:ea typeface="Arial"/>
-                <a:cs typeface="Arial"/>
-              </a:rPr>
-              <a:t xml:space="preserve">forever</a:t>
-            </a:r>
-            <a:endParaRPr lang="en-US" sz="3150"/>
-          </a:p>
-        </p:txBody>
-      </p:sp>
-      <p:sp>
-        <p:nvSpPr>
-          <p:cNvPr id="8" name="Text 8"/>
-          <p:cNvSpPr txBox="1"/>
-          <p:nvPr/>
-        </p:nvSpPr>
-        <p:spPr>
-          <a:xfrm>
-            <a:off x="685800" y="5385435"/>
-            <a:ext cx="904875" cy="476250"/>
-          </a:xfrm>
-          <a:prstGeom prst="rect">
-            <a:avLst/>
-          </a:prstGeom>
-          <a:noFill/>
-          <a:ln>
-            <a:noFill/>
-          </a:ln>
-        </p:spPr>
-        <p:txBody>
-          <a:bodyPr wrap="none" lIns="0" tIns="0" rIns="0" bIns="0" anchor="t">
-            <a:noAutofit/>
-          </a:bodyPr>
-          <a:lstStyle/>
-          <a:p>
-            <a:pPr marL="0" indent="0">
-              <a:lnSpc>
-                <a:spcPts val="2438"/>
-              </a:lnSpc>
-              <a:spcAft>
-                <a:spcPts val="0"/>
-              </a:spcAft>
-              <a:buNone/>
-            </a:pPr>
-            <a:r>
-              <a:rPr lang="en-US" sz="1875" b="0">
-                <a:solidFill>
-                  <a:srgbClr val="EFB45F"/>
-                </a:solidFill>
-                <a:latin typeface="Arial"/>
-                <a:ea typeface="Arial"/>
-                <a:cs typeface="Arial"/>
-              </a:rPr>
-              <a:t xml:space="preserve">03</a:t>
-            </a:r>
-            <a:endParaRPr lang="en-US" sz="1875"/>
-          </a:p>
-        </p:txBody>
-      </p:sp>
-      <p:sp>
-        <p:nvSpPr>
-          <p:cNvPr id="9" name="Text 9"/>
-          <p:cNvSpPr txBox="1"/>
-          <p:nvPr/>
-        </p:nvSpPr>
-        <p:spPr>
-          <a:xfrm>
-            <a:off x="2000250" y="5385435"/>
-            <a:ext cx="11029950" cy="1059180"/>
-          </a:xfrm>
-          <a:prstGeom prst="rect">
-            <a:avLst/>
-          </a:prstGeom>
-          <a:noFill/>
-          <a:ln>
-            <a:noFill/>
-          </a:ln>
-        </p:spPr>
-        <p:txBody>
-          <a:bodyPr wrap="none" lIns="0" tIns="0" rIns="0" bIns="0" anchor="t">
-            <a:noAutofit/>
-          </a:bodyPr>
-          <a:lstStyle/>
-          <a:p>
-            <a:pPr marL="0" indent="0">
-              <a:lnSpc>
-                <a:spcPts val="4095"/>
-              </a:lnSpc>
-              <a:spcAft>
-                <a:spcPts val="0"/>
-              </a:spcAft>
-              <a:buNone/>
-            </a:pPr>
-            <a:r>
-              <a:rPr lang="en-US" sz="3150" b="0">
-                <a:solidFill>
-                  <a:srgbClr val="F5F1E9"/>
-                </a:solidFill>
-                <a:latin typeface="Arial"/>
-                <a:ea typeface="Arial"/>
-                <a:cs typeface="Arial"/>
-              </a:rPr>
-              <a:t xml:space="preserve">Be careful firing the security bots. They know who</a:t>
-            </a:r>
-            <a:endParaRPr lang="en-US" sz="3150"/>
-          </a:p>
-          <a:p>
-            <a:pPr marL="0" indent="0">
-              <a:lnSpc>
-                <a:spcPts val="4095"/>
-              </a:lnSpc>
-              <a:spcAft>
-                <a:spcPts val="0"/>
-              </a:spcAft>
-              <a:buNone/>
-            </a:pPr>
-            <a:r>
-              <a:rPr lang="en-US" sz="3150" b="0">
-                <a:solidFill>
-                  <a:srgbClr val="F5F1E9"/>
-                </a:solidFill>
-                <a:latin typeface="Arial"/>
-                <a:ea typeface="Arial"/>
-                <a:cs typeface="Arial"/>
-              </a:rPr>
-              <a:t xml:space="preserve">you are.</a:t>
-            </a:r>
-            <a:endParaRPr lang="en-US" sz="3150"/>
-          </a:p>
-        </p:txBody>
-      </p:sp>
-      <p:sp>
-        <p:nvSpPr>
-          <p:cNvPr id="10" name="Text 10"/>
-          <p:cNvSpPr txBox="1"/>
-          <p:nvPr/>
-        </p:nvSpPr>
-        <p:spPr>
-          <a:xfrm>
-            <a:off x="457200" y="8286750"/>
-            <a:ext cx="12477750" cy="190500"/>
-          </a:xfrm>
-          <a:prstGeom prst="rect">
-            <a:avLst/>
-          </a:prstGeom>
-          <a:noFill/>
-          <a:ln>
-            <a:noFill/>
-          </a:ln>
-        </p:spPr>
-        <p:txBody>
-          <a:bodyPr wrap="none" lIns="0" tIns="0" rIns="0" bIns="0" anchor="t">
-            <a:noAutofit/>
-          </a:bodyPr>
-          <a:lstStyle/>
-          <a:p>
-            <a:pPr marL="0" indent="0">
-              <a:lnSpc>
-                <a:spcPts val="1268"/>
-              </a:lnSpc>
-              <a:spcAft>
-                <a:spcPts val="0"/>
-              </a:spcAft>
-              <a:buNone/>
-            </a:pPr>
-            <a:r>
-              <a:rPr lang="en-US" sz="975" b="0">
-                <a:solidFill>
-                  <a:srgbClr val="BEC9C6"/>
-                </a:solidFill>
-                <a:latin typeface="Arial"/>
-                <a:ea typeface="Arial"/>
-                <a:cs typeface="Arial"/>
-              </a:rPr>
-              <a:t xml:space="preserve">The Future of Product Engineering: Break the Mirror on Purpose</a:t>
-            </a:r>
-            <a:endParaRPr lang="en-US" sz="975"/>
-          </a:p>
-        </p:txBody>
-      </p:sp>
-      <p:sp>
-        <p:nvSpPr>
-          <p:cNvPr id="11" name="Text 11"/>
           <p:cNvSpPr txBox="1"/>
           <p:nvPr/>
         </p:nvSpPr>
@@ -10470,14 +10254,69 @@
       </p:sp>
       <p:sp>
         <p:nvSpPr>
-          <p:cNvPr id="4" name="Text 4"/>
+          <p:cNvPr id="4" name="Image background"/>
+          <p:cNvSpPr/>
+          <p:nvPr/>
+        </p:nvSpPr>
+        <p:spPr>
+          <a:xfrm>
+            <a:off x="944880" y="2647950"/>
+            <a:ext cx="11826240" cy="4619625"/>
+          </a:xfrm>
+          <a:prstGeom prst="rect">
+            <a:avLst/>
+          </a:prstGeom>
+          <a:solidFill>
+            <a:srgbClr val="161D26"/>
+          </a:solidFill>
+          <a:ln>
+            <a:noFill/>
+          </a:ln>
+        </p:spPr>
+      </p:sp>
+      <p:pic>
+        <p:nvPicPr>
+          <p:cNvPr id="5" name="f1622316a6930645ce2701de05e30b019086ac9401bd06917acb71f400ca25e3" descr="Prediction: a grid of chosen apps gives way to one generated surface, adapting per person, with a revived terminal beside it. Who owns that channel is still open, and non-frontier builders can rethink any app as AI-native."/>
+          <p:cNvPicPr>
+            <a:picLocks noChangeAspect="1"/>
+          </p:cNvPicPr>
+          <p:nvPr/>
+        </p:nvPicPr>
+        <p:blipFill>
+          <a:blip r:embed="rIdImage1">
+            <a:extLst>
+              <a:ext uri="{96DAC541-7B7A-43D3-8B79-37D633B846F1}">
+                <asvg:svgBlip xmlns:asvg="http://schemas.microsoft.com/office/drawing/2016/SVG/main" r:embed="rIdSvg1"/>
+              </a:ext>
+            </a:extLst>
+          </a:blip>
+          <a:stretch>
+            <a:fillRect/>
+          </a:stretch>
+        </p:blipFill>
+        <p:spPr>
+          <a:xfrm>
+            <a:off x="944880" y="2647950"/>
+            <a:ext cx="11826240" cy="4619625"/>
+          </a:xfrm>
+          <a:prstGeom prst="rect">
+            <a:avLst/>
+          </a:prstGeom>
+          <a:ln>
+            <a:noFill/>
+          </a:ln>
+        </p:spPr>
+      </p:pic>
+      <p:sp>
+        <p:nvSpPr>
+          <p:cNvPr id="6" name="Text 6"/>
           <p:cNvSpPr txBox="1"/>
           <p:nvPr/>
         </p:nvSpPr>
         <p:spPr>
           <a:xfrm>
-            <a:off x="685800" y="2771775"/>
-            <a:ext cx="904875" cy="476250"/>
+            <a:off x="457200" y="8286750"/>
+            <a:ext cx="12477750" cy="190500"/>
           </a:xfrm>
           <a:prstGeom prst="rect">
             <a:avLst/>
@@ -10495,348 +10334,31 @@
           <a:p>
             <a:pPr marL="0" indent="0">
               <a:lnSpc>
-                <a:spcPts val="2438"/>
-              </a:lnSpc>
-              <a:spcAft>
-                <a:spcPts val="0"/>
-              </a:spcAft>
-              <a:buNone/>
-            </a:pPr>
-            <a:r>
-              <a:rPr lang="en-US" sz="1875" b="0">
-                <a:solidFill>
-                  <a:srgbClr val="EFB45F"/>
-                </a:solidFill>
-                <a:latin typeface="Arial"/>
-                <a:ea typeface="Arial"/>
-                <a:cs typeface="Arial"/>
-              </a:rPr>
-              <a:t xml:space="preserve">01</a:t>
-            </a:r>
-            <a:endParaRPr lang="en-US" sz="1875"/>
-          </a:p>
-        </p:txBody>
-      </p:sp>
-      <p:sp>
-        <p:nvSpPr>
-          <p:cNvPr id="5" name="Text 5"/>
-          <p:cNvSpPr txBox="1"/>
-          <p:nvPr/>
-        </p:nvSpPr>
-        <p:spPr>
-          <a:xfrm>
-            <a:off x="2000250" y="2771775"/>
-            <a:ext cx="11029950" cy="539115"/>
-          </a:xfrm>
-          <a:prstGeom prst="rect">
-            <a:avLst/>
-          </a:prstGeom>
-          <a:noFill/>
-          <a:ln>
-            <a:noFill/>
-          </a:ln>
-        </p:spPr>
-        <p:txBody>
-          <a:bodyPr wrap="none" lIns="0" tIns="0" rIns="0" bIns="0" anchor="t">
-            <a:noAutofit/>
-          </a:bodyPr>
-          <a:lstStyle/>
-          <a:p>
-            <a:pPr marL="0" indent="0">
-              <a:lnSpc>
-                <a:spcPts val="4095"/>
-              </a:lnSpc>
-              <a:spcAft>
-                <a:spcPts val="0"/>
-              </a:spcAft>
-              <a:buNone/>
-            </a:pPr>
-            <a:r>
-              <a:rPr lang="en-US" sz="3150" b="0">
-                <a:solidFill>
-                  <a:srgbClr val="F5F1E9"/>
-                </a:solidFill>
-                <a:latin typeface="Arial"/>
-                <a:ea typeface="Arial"/>
-                <a:cs typeface="Arial"/>
-              </a:rPr>
-              <a:t xml:space="preserve">Generated UI, adapting in real time, per person</a:t>
-            </a:r>
-            <a:endParaRPr lang="en-US" sz="3150"/>
-          </a:p>
-        </p:txBody>
-      </p:sp>
-      <p:sp>
-        <p:nvSpPr>
-          <p:cNvPr id="6" name="Text 6"/>
-          <p:cNvSpPr txBox="1"/>
-          <p:nvPr/>
-        </p:nvSpPr>
-        <p:spPr>
-          <a:xfrm>
-            <a:off x="685800" y="3558540"/>
-            <a:ext cx="904875" cy="476250"/>
-          </a:xfrm>
-          <a:prstGeom prst="rect">
-            <a:avLst/>
-          </a:prstGeom>
-          <a:noFill/>
-          <a:ln>
-            <a:noFill/>
-          </a:ln>
-        </p:spPr>
-        <p:txBody>
-          <a:bodyPr wrap="none" lIns="0" tIns="0" rIns="0" bIns="0" anchor="t">
-            <a:noAutofit/>
-          </a:bodyPr>
-          <a:lstStyle/>
-          <a:p>
-            <a:pPr marL="0" indent="0">
-              <a:lnSpc>
-                <a:spcPts val="2438"/>
-              </a:lnSpc>
-              <a:spcAft>
-                <a:spcPts val="0"/>
-              </a:spcAft>
-              <a:buNone/>
-            </a:pPr>
-            <a:r>
-              <a:rPr lang="en-US" sz="1875" b="0">
-                <a:solidFill>
-                  <a:srgbClr val="EFB45F"/>
-                </a:solidFill>
-                <a:latin typeface="Arial"/>
-                <a:ea typeface="Arial"/>
-                <a:cs typeface="Arial"/>
-              </a:rPr>
-              <a:t xml:space="preserve">02</a:t>
-            </a:r>
-            <a:endParaRPr lang="en-US" sz="1875"/>
+                <a:spcPts val="1268"/>
+              </a:lnSpc>
+              <a:spcAft>
+                <a:spcPts val="0"/>
+              </a:spcAft>
+              <a:buNone/>
+            </a:pPr>
+            <a:r>
+              <a:rPr lang="en-US" sz="975" b="0">
+                <a:solidFill>
+                  <a:srgbClr val="BEC9C6"/>
+                </a:solidFill>
+                <a:latin typeface="Arial"/>
+                <a:ea typeface="Arial"/>
+                <a:cs typeface="Arial"/>
+              </a:rPr>
+              <a:t xml:space="preserve">The Future of Product Engineering: Break the Mirror on Purpose</a:t>
+            </a:r>
+            <a:endParaRPr lang="en-US" sz="975"/>
           </a:p>
         </p:txBody>
       </p:sp>
       <p:sp>
         <p:nvSpPr>
           <p:cNvPr id="7" name="Text 7"/>
-          <p:cNvSpPr txBox="1"/>
-          <p:nvPr/>
-        </p:nvSpPr>
-        <p:spPr>
-          <a:xfrm>
-            <a:off x="2000250" y="3558540"/>
-            <a:ext cx="11029950" cy="1059180"/>
-          </a:xfrm>
-          <a:prstGeom prst="rect">
-            <a:avLst/>
-          </a:prstGeom>
-          <a:noFill/>
-          <a:ln>
-            <a:noFill/>
-          </a:ln>
-        </p:spPr>
-        <p:txBody>
-          <a:bodyPr wrap="none" lIns="0" tIns="0" rIns="0" bIns="0" anchor="t">
-            <a:noAutofit/>
-          </a:bodyPr>
-          <a:lstStyle/>
-          <a:p>
-            <a:pPr marL="0" indent="0">
-              <a:lnSpc>
-                <a:spcPts val="4095"/>
-              </a:lnSpc>
-              <a:spcAft>
-                <a:spcPts val="0"/>
-              </a:spcAft>
-              <a:buNone/>
-            </a:pPr>
-            <a:r>
-              <a:rPr lang="en-US" sz="3150" b="0">
-                <a:solidFill>
-                  <a:srgbClr val="F5F1E9"/>
-                </a:solidFill>
-                <a:latin typeface="Arial"/>
-                <a:ea typeface="Arial"/>
-                <a:cs typeface="Arial"/>
-              </a:rPr>
-              <a:t xml:space="preserve">Yes, the software you mastered is going away. As you</a:t>
-            </a:r>
-            <a:endParaRPr lang="en-US" sz="3150"/>
-          </a:p>
-          <a:p>
-            <a:pPr marL="0" indent="0">
-              <a:lnSpc>
-                <a:spcPts val="4095"/>
-              </a:lnSpc>
-              <a:spcAft>
-                <a:spcPts val="0"/>
-              </a:spcAft>
-              <a:buNone/>
-            </a:pPr>
-            <a:r>
-              <a:rPr lang="en-US" sz="3150" b="0">
-                <a:solidFill>
-                  <a:srgbClr val="F5F1E9"/>
-                </a:solidFill>
-                <a:latin typeface="Arial"/>
-                <a:ea typeface="Arial"/>
-                <a:cs typeface="Arial"/>
-              </a:rPr>
-              <a:t xml:space="preserve">know it.</a:t>
-            </a:r>
-            <a:endParaRPr lang="en-US" sz="3150"/>
-          </a:p>
-        </p:txBody>
-      </p:sp>
-      <p:sp>
-        <p:nvSpPr>
-          <p:cNvPr id="8" name="Text 8"/>
-          <p:cNvSpPr txBox="1"/>
-          <p:nvPr/>
-        </p:nvSpPr>
-        <p:spPr>
-          <a:xfrm>
-            <a:off x="685800" y="4865370"/>
-            <a:ext cx="904875" cy="476250"/>
-          </a:xfrm>
-          <a:prstGeom prst="rect">
-            <a:avLst/>
-          </a:prstGeom>
-          <a:noFill/>
-          <a:ln>
-            <a:noFill/>
-          </a:ln>
-        </p:spPr>
-        <p:txBody>
-          <a:bodyPr wrap="none" lIns="0" tIns="0" rIns="0" bIns="0" anchor="t">
-            <a:noAutofit/>
-          </a:bodyPr>
-          <a:lstStyle/>
-          <a:p>
-            <a:pPr marL="0" indent="0">
-              <a:lnSpc>
-                <a:spcPts val="2438"/>
-              </a:lnSpc>
-              <a:spcAft>
-                <a:spcPts val="0"/>
-              </a:spcAft>
-              <a:buNone/>
-            </a:pPr>
-            <a:r>
-              <a:rPr lang="en-US" sz="1875" b="0">
-                <a:solidFill>
-                  <a:srgbClr val="EFB45F"/>
-                </a:solidFill>
-                <a:latin typeface="Arial"/>
-                <a:ea typeface="Arial"/>
-                <a:cs typeface="Arial"/>
-              </a:rPr>
-              <a:t xml:space="preserve">03</a:t>
-            </a:r>
-            <a:endParaRPr lang="en-US" sz="1875"/>
-          </a:p>
-        </p:txBody>
-      </p:sp>
-      <p:sp>
-        <p:nvSpPr>
-          <p:cNvPr id="9" name="Text 9"/>
-          <p:cNvSpPr txBox="1"/>
-          <p:nvPr/>
-        </p:nvSpPr>
-        <p:spPr>
-          <a:xfrm>
-            <a:off x="2000250" y="4865370"/>
-            <a:ext cx="11029950" cy="539115"/>
-          </a:xfrm>
-          <a:prstGeom prst="rect">
-            <a:avLst/>
-          </a:prstGeom>
-          <a:noFill/>
-          <a:ln>
-            <a:noFill/>
-          </a:ln>
-        </p:spPr>
-        <p:txBody>
-          <a:bodyPr wrap="none" lIns="0" tIns="0" rIns="0" bIns="0" anchor="t">
-            <a:noAutofit/>
-          </a:bodyPr>
-          <a:lstStyle/>
-          <a:p>
-            <a:pPr marL="0" indent="0">
-              <a:lnSpc>
-                <a:spcPts val="4095"/>
-              </a:lnSpc>
-              <a:spcAft>
-                <a:spcPts val="0"/>
-              </a:spcAft>
-              <a:buNone/>
-            </a:pPr>
-            <a:r>
-              <a:rPr lang="en-US" sz="3150" b="0">
-                <a:solidFill>
-                  <a:srgbClr val="F5F1E9"/>
-                </a:solidFill>
-                <a:latin typeface="Arial"/>
-                <a:ea typeface="Arial"/>
-                <a:cs typeface="Arial"/>
-              </a:rPr>
-              <a:t xml:space="preserve">The channel is not spoken for.</a:t>
-            </a:r>
-            <a:endParaRPr lang="en-US" sz="3150"/>
-          </a:p>
-        </p:txBody>
-      </p:sp>
-      <p:sp>
-        <p:nvSpPr>
-          <p:cNvPr id="10" name="Text 10"/>
-          <p:cNvSpPr txBox="1"/>
-          <p:nvPr/>
-        </p:nvSpPr>
-        <p:spPr>
-          <a:xfrm>
-            <a:off x="457200" y="8286750"/>
-            <a:ext cx="12477750" cy="190500"/>
-          </a:xfrm>
-          <a:prstGeom prst="rect">
-            <a:avLst/>
-          </a:prstGeom>
-          <a:noFill/>
-          <a:ln>
-            <a:noFill/>
-          </a:ln>
-        </p:spPr>
-        <p:txBody>
-          <a:bodyPr wrap="none" lIns="0" tIns="0" rIns="0" bIns="0" anchor="t">
-            <a:noAutofit/>
-          </a:bodyPr>
-          <a:lstStyle/>
-          <a:p>
-            <a:pPr marL="0" indent="0">
-              <a:lnSpc>
-                <a:spcPts val="1268"/>
-              </a:lnSpc>
-              <a:spcAft>
-                <a:spcPts val="0"/>
-              </a:spcAft>
-              <a:buNone/>
-            </a:pPr>
-            <a:r>
-              <a:rPr lang="en-US" sz="975" b="0">
-                <a:solidFill>
-                  <a:srgbClr val="BEC9C6"/>
-                </a:solidFill>
-                <a:latin typeface="Arial"/>
-                <a:ea typeface="Arial"/>
-                <a:cs typeface="Arial"/>
-              </a:rPr>
-              <a:t xml:space="preserve">The Future of Product Engineering: Break the Mirror on Purpose</a:t>
-            </a:r>
-            <a:endParaRPr lang="en-US" sz="975"/>
-          </a:p>
-        </p:txBody>
-      </p:sp>
-      <p:sp>
-        <p:nvSpPr>
-          <p:cNvPr id="11" name="Text 11"/>
           <p:cNvSpPr txBox="1"/>
           <p:nvPr/>
         </p:nvSpPr>

--- a/artifacts/speaking-portfolio-expanded/decks/product-engineering-40min-screen.pptx
+++ b/artifacts/speaking-portfolio-expanded/decks/product-engineering-40min-screen.pptx
@@ -155,7 +155,7 @@
                 <a:ea typeface="Arial"/>
                 <a:cs typeface="Arial"/>
               </a:rPr>
-              <a:t xml:space="preserve">00:00 to 02:30 · warm</a:t>
+              <a:t xml:space="preserve">00:00 to 02:00 · warm</a:t>
             </a:r>
             <a:endParaRPr lang="en-US" sz="1200"/>
           </a:p>
@@ -613,7 +613,7 @@
                 <a:ea typeface="Arial"/>
                 <a:cs typeface="Arial"/>
               </a:rPr>
-              <a:t xml:space="preserve">18:30 to 20:30 · build</a:t>
+              <a:t xml:space="preserve">16:30 to 18:00 · build</a:t>
             </a:r>
             <a:endParaRPr lang="en-US" sz="1200"/>
           </a:p>
@@ -1025,7 +1025,7 @@
                 <a:ea typeface="Arial"/>
                 <a:cs typeface="Arial"/>
               </a:rPr>
-              <a:t xml:space="preserve">20:30 to 25:00 · peak</a:t>
+              <a:t xml:space="preserve">18:00 to 22:30 · peak</a:t>
             </a:r>
             <a:endParaRPr lang="en-US" sz="1200"/>
           </a:p>
@@ -1506,7 +1506,7 @@
                 <a:ea typeface="Arial"/>
                 <a:cs typeface="Arial"/>
               </a:rPr>
-              <a:t xml:space="preserve">25:00 to 27:30 · build</a:t>
+              <a:t xml:space="preserve">22:30 to 24:30 · build</a:t>
             </a:r>
             <a:endParaRPr lang="en-US" sz="1200"/>
           </a:p>
@@ -1872,7 +1872,7 @@
                 <a:ea typeface="Arial"/>
                 <a:cs typeface="Arial"/>
               </a:rPr>
-              <a:t xml:space="preserve">27:30 to 30:00 · build</a:t>
+              <a:t xml:space="preserve">24:30 to 26:30 · build</a:t>
             </a:r>
             <a:endParaRPr lang="en-US" sz="1200"/>
           </a:p>
@@ -2330,7 +2330,7 @@
                 <a:ea typeface="Arial"/>
                 <a:cs typeface="Arial"/>
               </a:rPr>
-              <a:t xml:space="preserve">30:00 to 32:30 · build</a:t>
+              <a:t xml:space="preserve">26:30 to 30:30 · build</a:t>
             </a:r>
             <a:endParaRPr lang="en-US" sz="1200"/>
           </a:p>
@@ -2514,7 +2514,7 @@
                 <a:ea typeface="Arial"/>
                 <a:cs typeface="Arial"/>
               </a:rPr>
-              <a:t xml:space="preserve">Two predictions to close on, and I will label them as predictions once: this is where I think the operating model goes, not something I have measured. Here is the first. Today you buy tokens to build software. Before long most software will need a steady stream of them just to keep running: to stay current with its dependencies, to re-derive the integration a vendor renamed last night, to keep its own documentation true. Steady for some systems, bursty for others. Either way it stops being a build cost and becomes fuel, and you will meter it the way you meter electricity, which is to say you will only notice it when it moves.</a:t>
+              <a:t xml:space="preserve">Two predictions to close on, and I will label them as predictions once: this is where I think the operating model goes, not something I have measured. Here is the first. Today you buy tokens to build software. Before long most software will need a steady stream of them just to keep running — to stay current with its dependencies, to re-derive the integration a vendor renamed last night, to keep its own documentation true. It stops being a build cost and becomes fuel, metered like electricity, which is to say you only notice it when it moves.</a:t>
             </a:r>
             <a:endParaRPr lang="en-US" sz="1200"/>
           </a:p>
@@ -2560,7 +2560,7 @@
                 <a:ea typeface="Arial"/>
                 <a:cs typeface="Arial"/>
               </a:rPr>
-              <a:t xml:space="preserve">And some of that burn is not features at all. It is defense. If an attacker can point a tireless agent at your surface, the only symmetric answer is a tireless agent of your own: self-hacking around the clock, finding and mitigating faster than the countless people trying to get in. That is a permanent line item on a product that is otherwise finished. It never completes.</a:t>
+              <a:t xml:space="preserve">And some of that burn is not features at all. It is defense. If an attacker can point a tireless agent at your surface, the only symmetric answer is a tireless agent of your own, self-hacking around the clock. That is a permanent line item on a product that is otherwise finished. It never completes.</a:t>
             </a:r>
             <a:endParaRPr lang="en-US" sz="1200"/>
           </a:p>
@@ -2606,7 +2606,7 @@
                 <a:ea typeface="Arial"/>
                 <a:cs typeface="Arial"/>
               </a:rPr>
-              <a:t xml:space="preserve">Be careful when you fire the security sentry bots, incidentally. They know who you are. They know where the keys are. They have read all of your commits. Underneath the joke is the question from slide 12: an agent whose account you revoked while its credential is still live is the boring version of this, and it happens today.</a:t>
+              <a:t xml:space="preserve">Be careful when you fire the security sentry bots, incidentally. They know who you are. They know where the keys are. They have read all of your commits. Underneath the joke is slide 12's question: an agent whose account you revoked while its credential is still live is the boring version, and it happens today.</a:t>
             </a:r>
             <a:endParaRPr lang="en-US" sz="1200"/>
           </a:p>
@@ -2652,7 +2652,7 @@
                 <a:ea typeface="Arial"/>
                 <a:cs typeface="Arial"/>
               </a:rPr>
-              <a:t xml:space="preserve">So price it now. When you draw the wires between agents, one of those wires is a fuel line. The ongoing burn of a function belongs in the design doc beside its latency budget, and somebody owns that meter. It is not the person who wrote the prompt. Buy Me a Free Tier owns the arithmetic; what belongs on this org chart is the owner.</a:t>
+              <a:t xml:space="preserve">So price it now. When you draw the wires between agents, one of them is a fuel line. The ongoing burn belongs in the design doc beside the latency budget, and somebody owns that meter. Not the person who wrote the prompt. Buy Me a Free Tier owns the arithmetic; this org chart owns the owner.</a:t>
             </a:r>
             <a:endParaRPr lang="en-US" sz="1200"/>
           </a:p>
@@ -2903,7 +2903,7 @@
                 <a:ea typeface="Arial"/>
                 <a:cs typeface="Arial"/>
               </a:rPr>
-              <a:t xml:space="preserve">32:30 to 35:30 · land</a:t>
+              <a:t xml:space="preserve">30:30 to 35:00 · land</a:t>
             </a:r>
             <a:endParaRPr lang="en-US" sz="1200"/>
           </a:p>
@@ -3133,7 +3133,7 @@
                 <a:ea typeface="Arial"/>
                 <a:cs typeface="Arial"/>
               </a:rPr>
-              <a:t xml:space="preserve">And throwaway software is a taste most of this room has and most of the world does not. We are early adopters; we are delighted to regenerate a tool rather than maintain it. Normal people are not turned on by the idea of vibe coding their own recipe tracker, never mind a Slack replacement. What they will accept is an interface generated for them, adapting in real time, that they never had to choose from a menu of products.</a:t>
+              <a:t xml:space="preserve">And throwaway software is a taste this room has and the world does not. We are early adopters, delighted to regenerate a tool rather than maintain it. Normal people are not turned on by vibe coding their own recipe tracker, never mind a Slack replacement. What they will accept is an interface generated for them, adapting in real time, that they never had to choose off a shelf.</a:t>
             </a:r>
             <a:endParaRPr lang="en-US" sz="1200"/>
           </a:p>
@@ -3179,7 +3179,7 @@
                 <a:ea typeface="Arial"/>
                 <a:cs typeface="Arial"/>
               </a:rPr>
-              <a:t xml:space="preserve">Which raises the question this room should actually be arguing about. Should OpenAI and Anthropic end up owning every software channel? Watch what happens when the assistants ship real-time collaboration: who spends less time in email, Slack and Google Docs then? I can already make and edit images and video in ways that make me less likely to open Photoshop or DaVinci. If I need a jingle for the company, I ask Suno and it is done. So is everything you spent a lifetime learning, mastering and fighting with about to be irrelevant? Yes. At least as you know it.</a:t>
+              <a:t xml:space="preserve">Which raises the question this room should be arguing about. Should OpenAI and Anthropic end up owning every software channel? Watch what happens when the assistants ship real-time collaboration: who spends less time in email, Slack and Docs then? I can already edit images and video in ways that make me less likely to open Photoshop or DaVinci, and if I need a jingle I ask Suno and it is done. So is everything you spent a lifetime mastering about to be irrelevant? Yes. At least as you know it.</a:t>
             </a:r>
             <a:endParaRPr lang="en-US" sz="1200"/>
           </a:p>
@@ -3271,7 +3271,7 @@
                 <a:ea typeface="Arial"/>
                 <a:cs typeface="Arial"/>
               </a:rPr>
-              <a:t xml:space="preserve">Here is the part I want you to leave with. That future is not spoken for. GPT image being pretty good does not mean the story of image creation belongs to the big players, and the same is true in whichever industry you work in. Those of us who do not work at a frontier lab, the organic agents in the room, get to rethink any and every app as an AI-native system from the boundary up. That is this whole talk one level higher: do not photocopy today's product categories onto tomorrow's substrate either.</a:t>
+              <a:t xml:space="preserve">Here is the part I want you to leave with. That future is not spoken for. GPT image being pretty good does not mean image creation belongs to the big players, and the same holds in whichever industry you work in. Those of us who do not work at a frontier lab — the organic agents in the room — get to rethink any and every app as an AI-native system, from the boundary up. That is this whole talk one level higher: do not photocopy today's product categories onto tomorrow's substrate either.</a:t>
             </a:r>
             <a:endParaRPr lang="en-US" sz="1200"/>
           </a:p>
@@ -3476,7 +3476,7 @@
                 <a:ea typeface="Arial"/>
                 <a:cs typeface="Arial"/>
               </a:rPr>
-              <a:t xml:space="preserve">35:30 to 37:30 · land</a:t>
+              <a:t xml:space="preserve">35:00 to 37:00 · land</a:t>
             </a:r>
             <a:endParaRPr lang="en-US" sz="1200"/>
           </a:p>
@@ -3934,7 +3934,7 @@
                 <a:ea typeface="Arial"/>
                 <a:cs typeface="Arial"/>
               </a:rPr>
-              <a:t xml:space="preserve">37:30 to 40:00 · land</a:t>
+              <a:t xml:space="preserve">37:00 to 40:00 · land</a:t>
             </a:r>
             <a:endParaRPr lang="en-US" sz="1200"/>
           </a:p>
@@ -4323,7 +4323,7 @@
                 <a:ea typeface="Arial"/>
                 <a:cs typeface="Arial"/>
               </a:rPr>
-              <a:t xml:space="preserve">02:30 to 05:00 · warm</a:t>
+              <a:t xml:space="preserve">02:00 to 04:15 · warm</a:t>
             </a:r>
             <a:endParaRPr lang="en-US" sz="1200"/>
           </a:p>
@@ -4735,7 +4735,7 @@
                 <a:ea typeface="Arial"/>
                 <a:cs typeface="Arial"/>
               </a:rPr>
-              <a:t xml:space="preserve">05:00 to 07:30 · build</a:t>
+              <a:t xml:space="preserve">04:15 to 06:30 · build</a:t>
             </a:r>
             <a:endParaRPr lang="en-US" sz="1200"/>
           </a:p>
@@ -5147,7 +5147,7 @@
                 <a:ea typeface="Arial"/>
                 <a:cs typeface="Arial"/>
               </a:rPr>
-              <a:t xml:space="preserve">07:30 to 09:30 · build</a:t>
+              <a:t xml:space="preserve">06:30 to 08:00 · build</a:t>
             </a:r>
             <a:endParaRPr lang="en-US" sz="1200"/>
           </a:p>
@@ -5559,7 +5559,7 @@
                 <a:ea typeface="Arial"/>
                 <a:cs typeface="Arial"/>
               </a:rPr>
-              <a:t xml:space="preserve">09:30 to 12:00 · build</a:t>
+              <a:t xml:space="preserve">08:00 to 10:00 · build</a:t>
             </a:r>
             <a:endParaRPr lang="en-US" sz="1200"/>
           </a:p>
@@ -6040,7 +6040,7 @@
                 <a:ea typeface="Arial"/>
                 <a:cs typeface="Arial"/>
               </a:rPr>
-              <a:t xml:space="preserve">12:00 to 14:00 · build</a:t>
+              <a:t xml:space="preserve">10:00 to 11:30 · build</a:t>
             </a:r>
             <a:endParaRPr lang="en-US" sz="1200"/>
           </a:p>
@@ -6452,7 +6452,7 @@
                 <a:ea typeface="Arial"/>
                 <a:cs typeface="Arial"/>
               </a:rPr>
-              <a:t xml:space="preserve">14:00 to 15:00 · build</a:t>
+              <a:t xml:space="preserve">11:30 to 12:45 · build</a:t>
             </a:r>
             <a:endParaRPr lang="en-US" sz="1200"/>
           </a:p>
@@ -6818,7 +6818,7 @@
                 <a:ea typeface="Arial"/>
                 <a:cs typeface="Arial"/>
               </a:rPr>
-              <a:t xml:space="preserve">15:00 to 16:30 · build</a:t>
+              <a:t xml:space="preserve">12:45 to 14:30 · build</a:t>
             </a:r>
             <a:endParaRPr lang="en-US" sz="1200"/>
           </a:p>
@@ -7184,7 +7184,7 @@
                 <a:ea typeface="Arial"/>
                 <a:cs typeface="Arial"/>
               </a:rPr>
-              <a:t xml:space="preserve">16:30 to 18:30 · build</a:t>
+              <a:t xml:space="preserve">14:30 to 16:30 · build</a:t>
             </a:r>
             <a:endParaRPr lang="en-US" sz="1200"/>
           </a:p>
